--- a/SIH2026_GeoVoxel_SIH26011.pptx
+++ b/SIH2026_GeoVoxel_SIH26011.pptx
@@ -5655,7 +5655,7 @@
               </a:spcAft>
             </a:pPr>
             <a:r>
-              <a:rPr sz="1700" b="1">
+              <a:rPr sz="1700" b="1" i="0">
                 <a:solidFill>
                   <a:srgbClr val="1E293B"/>
                 </a:solidFill>
@@ -5664,7 +5664,7 @@
               <a:t>Problem Statement ID – </a:t>
             </a:r>
             <a:r>
-              <a:rPr sz="1700" b="1">
+              <a:rPr sz="1700" b="1" i="0">
                 <a:solidFill>
                   <a:srgbClr val="0284C7"/>
                 </a:solidFill>
@@ -5680,7 +5680,7 @@
               </a:spcAft>
             </a:pPr>
             <a:r>
-              <a:rPr sz="1700" b="1">
+              <a:rPr sz="1700" b="1" i="0">
                 <a:solidFill>
                   <a:srgbClr val="1E293B"/>
                 </a:solidFill>
@@ -5689,7 +5689,7 @@
               <a:t>Problem Statement Title – </a:t>
             </a:r>
             <a:r>
-              <a:rPr sz="1700" b="1">
+              <a:rPr sz="1700" b="1" i="0">
                 <a:solidFill>
                   <a:srgbClr val="0F172A"/>
                 </a:solidFill>
@@ -5705,7 +5705,7 @@
               </a:spcAft>
             </a:pPr>
             <a:r>
-              <a:rPr sz="1700" b="1">
+              <a:rPr sz="1700" b="1" i="0">
                 <a:solidFill>
                   <a:srgbClr val="1E293B"/>
                 </a:solidFill>
@@ -5714,7 +5714,7 @@
               <a:t>Theme – </a:t>
             </a:r>
             <a:r>
-              <a:rPr sz="1700" b="0">
+              <a:rPr sz="1700" b="0" i="0">
                 <a:solidFill>
                   <a:srgbClr val="1E293B"/>
                 </a:solidFill>
@@ -5730,7 +5730,7 @@
               </a:spcAft>
             </a:pPr>
             <a:r>
-              <a:rPr sz="1700" b="1">
+              <a:rPr sz="1700" b="1" i="0">
                 <a:solidFill>
                   <a:srgbClr val="1E293B"/>
                 </a:solidFill>
@@ -5739,7 +5739,7 @@
               <a:t>PS Category – </a:t>
             </a:r>
             <a:r>
-              <a:rPr sz="1700" b="0">
+              <a:rPr sz="1700" b="0" i="0">
                 <a:solidFill>
                   <a:srgbClr val="1E293B"/>
                 </a:solidFill>
@@ -5755,7 +5755,7 @@
               </a:spcAft>
             </a:pPr>
             <a:r>
-              <a:rPr sz="1700" b="1">
+              <a:rPr sz="1700" b="1" i="0">
                 <a:solidFill>
                   <a:srgbClr val="1E293B"/>
                 </a:solidFill>
@@ -5764,7 +5764,7 @@
               <a:t>Team Name (Registered on portal) – </a:t>
             </a:r>
             <a:r>
-              <a:rPr sz="1700" b="1">
+              <a:rPr sz="1700" b="1" i="0">
                 <a:solidFill>
                   <a:srgbClr val="4F46E5"/>
                 </a:solidFill>
@@ -6044,7 +6044,7 @@
           <a:p>
             <a:pPr algn="ctr"/>
             <a:r>
-              <a:rPr sz="1200" b="1">
+              <a:rPr sz="1200" b="1" i="0">
                 <a:solidFill>
                   <a:srgbClr val="FFFFFF"/>
                 </a:solidFill>
@@ -6057,7 +6057,7 @@
           <a:p>
             <a:pPr algn="ctr"/>
             <a:r>
-              <a:rPr sz="850" b="0">
+              <a:rPr sz="850" b="0" i="0">
                 <a:solidFill>
                   <a:srgbClr val="A5B4FC"/>
                 </a:solidFill>
@@ -6100,57 +6100,14 @@
       </p:pic>
       <p:sp>
         <p:nvSpPr>
-          <p:cNvPr id="15362" name="Rectangle 15361"/>
+          <p:cNvPr id="15362" name="Rounded Rectangle 15361"/>
           <p:cNvSpPr/>
           <p:nvPr/>
         </p:nvSpPr>
         <p:spPr>
           <a:xfrm>
             <a:off x="502920" y="1188720"/>
-            <a:ext cx="54864" cy="4754880"/>
-          </a:xfrm>
-          <a:prstGeom prst="rect">
-            <a:avLst/>
-          </a:prstGeom>
-          <a:solidFill>
-            <a:srgbClr val="0EA5E9"/>
-          </a:solidFill>
-          <a:ln>
-            <a:noFill/>
-          </a:ln>
-        </p:spPr>
-        <p:style>
-          <a:lnRef idx="1">
-            <a:schemeClr val="accent1"/>
-          </a:lnRef>
-          <a:fillRef idx="3">
-            <a:schemeClr val="accent1"/>
-          </a:fillRef>
-          <a:effectRef idx="2">
-            <a:schemeClr val="accent1"/>
-          </a:effectRef>
-          <a:fontRef idx="minor">
-            <a:schemeClr val="lt1"/>
-          </a:fontRef>
-        </p:style>
-        <p:txBody>
-          <a:bodyPr rtlCol="0" anchor="ctr"/>
-          <a:lstStyle/>
-          <a:p>
-            <a:pPr algn="ctr"/>
-          </a:p>
-        </p:txBody>
-      </p:sp>
-      <p:sp>
-        <p:nvSpPr>
-          <p:cNvPr id="15363" name="Rounded Rectangle 15362"/>
-          <p:cNvSpPr/>
-          <p:nvPr/>
-        </p:nvSpPr>
-        <p:spPr>
-          <a:xfrm>
-            <a:off x="594360" y="1188720"/>
-            <a:ext cx="6126480" cy="4754880"/>
+            <a:ext cx="6217920" cy="4754880"/>
           </a:xfrm>
           <a:prstGeom prst="roundRect">
             <a:avLst/>
@@ -6187,216 +6144,216 @@
                 <a:spcPts val="0"/>
               </a:spcBef>
               <a:spcAft>
-                <a:spcPts val="200"/>
+                <a:spcPts val="300"/>
               </a:spcAft>
             </a:pPr>
             <a:r>
-              <a:rPr sz="1100" b="1" i="0">
+              <a:rPr sz="1150" b="1" i="0">
                 <a:solidFill>
                   <a:srgbClr val="0284C7"/>
                 </a:solidFill>
                 <a:latin typeface="Arial"/>
               </a:rPr>
-              <a:t>⚡ Proposed Solution</a:t>
+              <a:t>Proposed Solution</a:t>
             </a:r>
           </a:p>
           <a:p>
             <a:pPr>
               <a:spcAft>
-                <a:spcPts val="250"/>
+                <a:spcPts val="300"/>
               </a:spcAft>
             </a:pPr>
             <a:r>
-              <a:rPr sz="880" b="0" i="0">
+              <a:rPr sz="900" b="0" i="0">
                 <a:solidFill>
                   <a:srgbClr val="1E293B"/>
                 </a:solidFill>
                 <a:latin typeface="Arial"/>
               </a:rPr>
-              <a:t>• End-to-end autonomous geospatial pipeline that generates India's first production-ready 3D vertical cadastre, transforming 2D Bhu-Aadhaar (ULPIN) into legally actionable volumetric land parcels.</a:t>
+              <a:t>  Autonomous geospatial pipeline generating India's first 3D vertical cadastre from open-source satellite and survey data.</a:t>
             </a:r>
           </a:p>
           <a:p>
             <a:pPr>
               <a:spcAft>
-                <a:spcPts val="250"/>
+                <a:spcPts val="300"/>
               </a:spcAft>
             </a:pPr>
             <a:r>
-              <a:rPr sz="880" b="0" i="0">
+              <a:rPr sz="900" b="0" i="0">
                 <a:solidFill>
                   <a:srgbClr val="1E293B"/>
                 </a:solidFill>
                 <a:latin typeface="Arial"/>
               </a:rPr>
-              <a:t>• Interactive 60 FPS WebGL digital twin built on Next.js 16 + Three.js, delivering real-time building inspection, floor isolation, and solar analysis in any browser.</a:t>
+              <a:t>  60 FPS WebGL digital twin with real-time building inspection, floor isolation, and solar analysis.</a:t>
             </a:r>
           </a:p>
           <a:p>
             <a:pPr>
               <a:spcBef>
-                <a:spcPts val="600"/>
+                <a:spcPts val="700"/>
               </a:spcBef>
               <a:spcAft>
-                <a:spcPts val="200"/>
+                <a:spcPts val="300"/>
               </a:spcAft>
             </a:pPr>
             <a:r>
-              <a:rPr sz="1100" b="1" i="0">
+              <a:rPr sz="1150" b="1" i="0">
                 <a:solidFill>
                   <a:srgbClr val="4F46E5"/>
                 </a:solidFill>
                 <a:latin typeface="Arial"/>
               </a:rPr>
-              <a:t>🔬 Detailed Technical Solution</a:t>
+              <a:t>Technical Approach</a:t>
             </a:r>
           </a:p>
           <a:p>
             <a:pPr>
               <a:spcAft>
-                <a:spcPts val="250"/>
+                <a:spcPts val="300"/>
               </a:spcAft>
             </a:pPr>
             <a:r>
-              <a:rPr sz="880" b="0" i="0">
+              <a:rPr sz="900" b="0" i="0">
                 <a:solidFill>
                   <a:srgbClr val="1E293B"/>
                 </a:solidFill>
                 <a:latin typeface="Arial"/>
               </a:rPr>
-              <a:t>• Tier 1 (Unit-Level 3D ULPIN): Parses sanctioned TS-RERA architectural blueprints into individual flat/unit parcels ({ULPIN-2D}-FLxx-Uyyyy) with carpet area, facing direction, and Z-coordinates.</a:t>
+              <a:t>  Tier 1 — Unit-Level: Parses RERA blueprints into individual flat parcels with carpet area, facing, and Z-coordinates.</a:t>
             </a:r>
           </a:p>
           <a:p>
             <a:pPr>
               <a:spcAft>
-                <a:spcPts val="250"/>
+                <a:spcPts val="300"/>
               </a:spcAft>
             </a:pPr>
             <a:r>
-              <a:rPr sz="880" b="0" i="0">
+              <a:rPr sz="900" b="0" i="0">
                 <a:solidFill>
                   <a:srgbClr val="1E293B"/>
                 </a:solidFill>
                 <a:latin typeface="Arial"/>
               </a:rPr>
-              <a:t>• Tier 2 (Floor-Level 3D ULPIN): Automated vertical cadastre ({ULPIN-2D}-FLxx) for all buildings via hybrid DSM-DEM height estimation with zero-discrepancy floor normalization.</a:t>
+              <a:t>  Tier 2 — Floor-Level: Automated slicing via DSM-DEM height estimation with zero-discrepancy normalization.</a:t>
             </a:r>
           </a:p>
           <a:p>
             <a:pPr>
               <a:spcBef>
-                <a:spcPts val="600"/>
+                <a:spcPts val="700"/>
               </a:spcBef>
               <a:spcAft>
-                <a:spcPts val="200"/>
+                <a:spcPts val="300"/>
               </a:spcAft>
             </a:pPr>
             <a:r>
-              <a:rPr sz="1100" b="1" i="0">
+              <a:rPr sz="1150" b="1" i="0">
                 <a:solidFill>
                   <a:srgbClr val="059669"/>
                 </a:solidFill>
                 <a:latin typeface="Arial"/>
               </a:rPr>
-              <a:t>🎯 How It Addresses The Problem</a:t>
+              <a:t>Problem Addressed</a:t>
             </a:r>
           </a:p>
           <a:p>
             <a:pPr>
               <a:spcAft>
-                <a:spcPts val="250"/>
+                <a:spcPts val="300"/>
               </a:spcAft>
             </a:pPr>
             <a:r>
-              <a:rPr sz="880" b="0" i="0">
+              <a:rPr sz="900" b="0" i="0">
                 <a:solidFill>
                   <a:srgbClr val="1E293B"/>
                 </a:solidFill>
                 <a:latin typeface="Arial"/>
               </a:rPr>
-              <a:t>• Eliminates multi-ownership chaos where hundreds of apartment owners share a single 2D survey number — each unit now has its own unique 3D spatial identity.</a:t>
+              <a:t>  Replaces ambiguous 2D survey numbers with unique 3D spatial identities for every apartment unit.</a:t>
             </a:r>
           </a:p>
           <a:p>
             <a:pPr>
               <a:spcAft>
-                <a:spcPts val="250"/>
+                <a:spcPts val="300"/>
               </a:spcAft>
             </a:pPr>
             <a:r>
-              <a:rPr sz="880" b="0" i="0">
+              <a:rPr sz="900" b="0" i="0">
                 <a:solidFill>
                   <a:srgbClr val="1E293B"/>
                 </a:solidFill>
                 <a:latin typeface="Arial"/>
               </a:rPr>
-              <a:t>• Creates undisputed legal 3D spatial parcels (Z-min, Z-max MSL) aligned with ISO 19152 LADM Part 3 and OGC CityGML 3.0 standards.</a:t>
+              <a:t>  ISO 19152 LADM + OGC CityGML compliant legal 3D parcels (Z-min, Z-max MSL).</a:t>
             </a:r>
           </a:p>
           <a:p>
             <a:pPr>
               <a:spcBef>
-                <a:spcPts val="600"/>
+                <a:spcPts val="700"/>
               </a:spcBef>
               <a:spcAft>
-                <a:spcPts val="200"/>
+                <a:spcPts val="300"/>
               </a:spcAft>
             </a:pPr>
             <a:r>
-              <a:rPr sz="1100" b="1" i="0">
+              <a:rPr sz="1150" b="1" i="0">
                 <a:solidFill>
                   <a:srgbClr val="E11D48"/>
                 </a:solidFill>
                 <a:latin typeface="Arial"/>
               </a:rPr>
-              <a:t>💡 Innovation &amp; Uniqueness</a:t>
+              <a:t>Innovation</a:t>
             </a:r>
           </a:p>
           <a:p>
             <a:pPr>
               <a:spcAft>
-                <a:spcPts val="250"/>
+                <a:spcPts val="300"/>
               </a:spcAft>
             </a:pPr>
             <a:r>
-              <a:rPr sz="880" b="0" i="0">
+              <a:rPr sz="900" b="0" i="0">
                 <a:solidFill>
                   <a:srgbClr val="1E293B"/>
                 </a:solidFill>
                 <a:latin typeface="Arial"/>
               </a:rPr>
-              <a:t>• Zero-Discrepancy Floor Slab Engine: Proportional normalization guarantees ∑ hᵢ ≡ H_building with 0.00m cumulative error across all 4,641 buildings.</a:t>
+              <a:t>  Zero-Discrepancy Floor Slab Engine: cumulative height error = 0.00m across 4,641 buildings.</a:t>
             </a:r>
           </a:p>
           <a:p>
             <a:pPr>
               <a:spcAft>
-                <a:spcPts val="250"/>
+                <a:spcPts val="300"/>
               </a:spcAft>
             </a:pPr>
             <a:r>
-              <a:rPr sz="880" b="0" i="0">
+              <a:rPr sz="900" b="0" i="0">
                 <a:solidFill>
                   <a:srgbClr val="1E293B"/>
                 </a:solidFill>
                 <a:latin typeface="Arial"/>
               </a:rPr>
-              <a:t>• Client-Side 60 FPS Digital Twin: Full BatchedMesh / LOD rendering of 22,761 volumetric parcels + 238 km road network — no server GPU required.</a:t>
-            </a:r>
-          </a:p>
-        </p:txBody>
-      </p:sp>
-      <p:sp>
-        <p:nvSpPr>
-          <p:cNvPr id="15364" name="Rounded Rectangle 15363"/>
+              <a:t>  Client-side 60 FPS rendering of 22,761 volumetric parcels — no server GPU required.</a:t>
+            </a:r>
+          </a:p>
+        </p:txBody>
+      </p:sp>
+      <p:sp>
+        <p:nvSpPr>
+          <p:cNvPr id="15363" name="Rounded Rectangle 15362"/>
           <p:cNvSpPr/>
           <p:nvPr/>
         </p:nvSpPr>
         <p:spPr>
           <a:xfrm>
             <a:off x="6949440" y="1188720"/>
-            <a:ext cx="4709160" cy="1234440"/>
+            <a:ext cx="4709160" cy="1143000"/>
           </a:xfrm>
           <a:prstGeom prst="roundRect">
             <a:avLst/>
@@ -6436,13 +6393,13 @@
                 </a:solidFill>
                 <a:latin typeface="Arial"/>
               </a:rPr>
-              <a:t>🏛 GOVERNMENT 2D BHU-AADHAAR (ULPIN)</a:t>
+              <a:t>GOVERNMENT 2D BHU-AADHAAR (ULPIN)</a:t>
             </a:r>
           </a:p>
           <a:p>
             <a:pPr algn="ctr"/>
             <a:r>
-              <a:rPr sz="1600" b="1" i="0">
+              <a:rPr sz="1500" b="1" i="0">
                 <a:solidFill>
                   <a:srgbClr val="FFFFFF"/>
                 </a:solidFill>
@@ -6457,7 +6414,7 @@
                 </a:solidFill>
                 <a:latin typeface="Arial"/>
               </a:rPr>
-              <a:t>  (14-Digit DoLR Standard)</a:t>
+              <a:t>  14-Digit DoLR Standard</a:t>
             </a:r>
           </a:p>
           <a:p>
@@ -6469,279 +6426,21 @@
                 </a:solidFill>
                 <a:latin typeface="Arial"/>
               </a:rPr>
-              <a:t>State: 36 · District: 21 · Mandal: 05 · Village: 0103 · Survey: 83/1</a:t>
-            </a:r>
-          </a:p>
-        </p:txBody>
-      </p:sp>
-      <p:sp>
-        <p:nvSpPr>
-          <p:cNvPr id="15365" name="Rectangle 15364"/>
+              <a:t>State 36 | District 21 | Mandal 05 | Village 0103 | Survey 83/1</a:t>
+            </a:r>
+          </a:p>
+        </p:txBody>
+      </p:sp>
+      <p:sp>
+        <p:nvSpPr>
+          <p:cNvPr id="15364" name="Rounded Rectangle 15363"/>
           <p:cNvSpPr/>
           <p:nvPr/>
         </p:nvSpPr>
         <p:spPr>
           <a:xfrm>
-            <a:off x="7040880" y="1234440"/>
-            <a:ext cx="4526280" cy="45720"/>
-          </a:xfrm>
-          <a:prstGeom prst="rect">
-            <a:avLst/>
-          </a:prstGeom>
-          <a:solidFill>
-            <a:srgbClr val="38BDF8"/>
-          </a:solidFill>
-          <a:ln>
-            <a:noFill/>
-          </a:ln>
-        </p:spPr>
-        <p:style>
-          <a:lnRef idx="1">
-            <a:schemeClr val="accent1"/>
-          </a:lnRef>
-          <a:fillRef idx="3">
-            <a:schemeClr val="accent1"/>
-          </a:fillRef>
-          <a:effectRef idx="2">
-            <a:schemeClr val="accent1"/>
-          </a:effectRef>
-          <a:fontRef idx="minor">
-            <a:schemeClr val="lt1"/>
-          </a:fontRef>
-        </p:style>
-        <p:txBody>
-          <a:bodyPr rtlCol="0" anchor="ctr"/>
-          <a:lstStyle/>
-          <a:p>
-            <a:pPr algn="ctr"/>
-          </a:p>
-        </p:txBody>
-      </p:sp>
-      <p:sp>
-        <p:nvSpPr>
-          <p:cNvPr id="15366" name="Rectangle 15365"/>
-          <p:cNvSpPr/>
-          <p:nvPr/>
-        </p:nvSpPr>
-        <p:spPr>
-          <a:xfrm>
-            <a:off x="9070848" y="2450592"/>
-            <a:ext cx="54864" cy="201168"/>
-          </a:xfrm>
-          <a:prstGeom prst="rect">
-            <a:avLst/>
-          </a:prstGeom>
-          <a:solidFill>
-            <a:srgbClr val="38BDF8"/>
-          </a:solidFill>
-          <a:ln>
-            <a:noFill/>
-          </a:ln>
-        </p:spPr>
-        <p:style>
-          <a:lnRef idx="1">
-            <a:schemeClr val="accent1"/>
-          </a:lnRef>
-          <a:fillRef idx="3">
-            <a:schemeClr val="accent1"/>
-          </a:fillRef>
-          <a:effectRef idx="2">
-            <a:schemeClr val="accent1"/>
-          </a:effectRef>
-          <a:fontRef idx="minor">
-            <a:schemeClr val="lt1"/>
-          </a:fontRef>
-        </p:style>
-        <p:txBody>
-          <a:bodyPr rtlCol="0" anchor="ctr"/>
-          <a:lstStyle/>
-          <a:p>
-            <a:pPr algn="ctr"/>
-          </a:p>
-        </p:txBody>
-      </p:sp>
-      <p:sp>
-        <p:nvSpPr>
-          <p:cNvPr id="15367" name="Rectangle 15366"/>
-          <p:cNvSpPr/>
-          <p:nvPr/>
-        </p:nvSpPr>
-        <p:spPr>
-          <a:xfrm>
-            <a:off x="7772400" y="2633472"/>
-            <a:ext cx="1371600" cy="36576"/>
-          </a:xfrm>
-          <a:prstGeom prst="rect">
-            <a:avLst/>
-          </a:prstGeom>
-          <a:solidFill>
-            <a:srgbClr val="38BDF8"/>
-          </a:solidFill>
-          <a:ln>
-            <a:noFill/>
-          </a:ln>
-        </p:spPr>
-        <p:style>
-          <a:lnRef idx="1">
-            <a:schemeClr val="accent1"/>
-          </a:lnRef>
-          <a:fillRef idx="3">
-            <a:schemeClr val="accent1"/>
-          </a:fillRef>
-          <a:effectRef idx="2">
-            <a:schemeClr val="accent1"/>
-          </a:effectRef>
-          <a:fontRef idx="minor">
-            <a:schemeClr val="lt1"/>
-          </a:fontRef>
-        </p:style>
-        <p:txBody>
-          <a:bodyPr rtlCol="0" anchor="ctr"/>
-          <a:lstStyle/>
-          <a:p>
-            <a:pPr algn="ctr"/>
-          </a:p>
-        </p:txBody>
-      </p:sp>
-      <p:sp>
-        <p:nvSpPr>
-          <p:cNvPr id="15368" name="Rectangle 15367"/>
-          <p:cNvSpPr/>
-          <p:nvPr/>
-        </p:nvSpPr>
-        <p:spPr>
-          <a:xfrm>
-            <a:off x="7772400" y="2633472"/>
-            <a:ext cx="36576" cy="182880"/>
-          </a:xfrm>
-          <a:prstGeom prst="rect">
-            <a:avLst/>
-          </a:prstGeom>
-          <a:solidFill>
-            <a:srgbClr val="38BDF8"/>
-          </a:solidFill>
-          <a:ln>
-            <a:noFill/>
-          </a:ln>
-        </p:spPr>
-        <p:style>
-          <a:lnRef idx="1">
-            <a:schemeClr val="accent1"/>
-          </a:lnRef>
-          <a:fillRef idx="3">
-            <a:schemeClr val="accent1"/>
-          </a:fillRef>
-          <a:effectRef idx="2">
-            <a:schemeClr val="accent1"/>
-          </a:effectRef>
-          <a:fontRef idx="minor">
-            <a:schemeClr val="lt1"/>
-          </a:fontRef>
-        </p:style>
-        <p:txBody>
-          <a:bodyPr rtlCol="0" anchor="ctr"/>
-          <a:lstStyle/>
-          <a:p>
-            <a:pPr algn="ctr"/>
-          </a:p>
-        </p:txBody>
-      </p:sp>
-      <p:sp>
-        <p:nvSpPr>
-          <p:cNvPr id="15369" name="Rectangle 15368"/>
-          <p:cNvSpPr/>
-          <p:nvPr/>
-        </p:nvSpPr>
-        <p:spPr>
-          <a:xfrm>
-            <a:off x="9098280" y="2633472"/>
-            <a:ext cx="1371600" cy="36576"/>
-          </a:xfrm>
-          <a:prstGeom prst="rect">
-            <a:avLst/>
-          </a:prstGeom>
-          <a:solidFill>
-            <a:srgbClr val="38BDF8"/>
-          </a:solidFill>
-          <a:ln>
-            <a:noFill/>
-          </a:ln>
-        </p:spPr>
-        <p:style>
-          <a:lnRef idx="1">
-            <a:schemeClr val="accent1"/>
-          </a:lnRef>
-          <a:fillRef idx="3">
-            <a:schemeClr val="accent1"/>
-          </a:fillRef>
-          <a:effectRef idx="2">
-            <a:schemeClr val="accent1"/>
-          </a:effectRef>
-          <a:fontRef idx="minor">
-            <a:schemeClr val="lt1"/>
-          </a:fontRef>
-        </p:style>
-        <p:txBody>
-          <a:bodyPr rtlCol="0" anchor="ctr"/>
-          <a:lstStyle/>
-          <a:p>
-            <a:pPr algn="ctr"/>
-          </a:p>
-        </p:txBody>
-      </p:sp>
-      <p:sp>
-        <p:nvSpPr>
-          <p:cNvPr id="15370" name="Rectangle 15369"/>
-          <p:cNvSpPr/>
-          <p:nvPr/>
-        </p:nvSpPr>
-        <p:spPr>
-          <a:xfrm>
-            <a:off x="10442448" y="2633472"/>
-            <a:ext cx="36576" cy="182880"/>
-          </a:xfrm>
-          <a:prstGeom prst="rect">
-            <a:avLst/>
-          </a:prstGeom>
-          <a:solidFill>
-            <a:srgbClr val="38BDF8"/>
-          </a:solidFill>
-          <a:ln>
-            <a:noFill/>
-          </a:ln>
-        </p:spPr>
-        <p:style>
-          <a:lnRef idx="1">
-            <a:schemeClr val="accent1"/>
-          </a:lnRef>
-          <a:fillRef idx="3">
-            <a:schemeClr val="accent1"/>
-          </a:fillRef>
-          <a:effectRef idx="2">
-            <a:schemeClr val="accent1"/>
-          </a:effectRef>
-          <a:fontRef idx="minor">
-            <a:schemeClr val="lt1"/>
-          </a:fontRef>
-        </p:style>
-        <p:txBody>
-          <a:bodyPr rtlCol="0" anchor="ctr"/>
-          <a:lstStyle/>
-          <a:p>
-            <a:pPr algn="ctr"/>
-          </a:p>
-        </p:txBody>
-      </p:sp>
-      <p:sp>
-        <p:nvSpPr>
-          <p:cNvPr id="15371" name="Rounded Rectangle 15370"/>
-          <p:cNvSpPr/>
-          <p:nvPr/>
-        </p:nvSpPr>
-        <p:spPr>
-          <a:xfrm>
-            <a:off x="6949440" y="2852928"/>
-            <a:ext cx="2267712" cy="3090672"/>
+            <a:off x="6949440" y="2487168"/>
+            <a:ext cx="2286000" cy="3456432"/>
           </a:xfrm>
           <a:prstGeom prst="roundRect">
             <a:avLst/>
@@ -6770,7 +6469,7 @@
           </a:fontRef>
         </p:style>
         <p:txBody>
-          <a:bodyPr rtlCol="0" anchor="ctr" wrap="square" tIns="91440" bIns="91440"/>
+          <a:bodyPr rtlCol="0" anchor="ctr" wrap="square" tIns="109728" bIns="91440"/>
           <a:lstStyle/>
           <a:p>
             <a:pPr algn="ctr"/>
@@ -6787,7 +6486,7 @@
           <a:p>
             <a:pPr algn="ctr">
               <a:spcAft>
-                <a:spcPts val="300"/>
+                <a:spcPts val="400"/>
               </a:spcAft>
             </a:pPr>
             <a:r>
@@ -6797,25 +6496,26 @@
                 </a:solidFill>
                 <a:latin typeface="Arial"/>
               </a:rPr>
-              <a:t>(Sanctioned RERA Blueprints)</a:t>
+              <a:t>Sanctioned RERA Blueprints</a:t>
             </a:r>
           </a:p>
           <a:p>
             <a:pPr>
               <a:spcBef>
-                <a:spcPts val="300"/>
+                <a:spcPts val="400"/>
               </a:spcBef>
             </a:pPr>
             <a:r>
-              <a:rPr sz="750" b="1" i="0">
+              <a:rPr sz="780" b="1" i="0">
                 <a:solidFill>
                   <a:srgbClr val="FFFFFF"/>
                 </a:solidFill>
                 <a:latin typeface="Arial"/>
               </a:rPr>
-              <a:t>▸ -FL32-U3201
-</a:t>
-            </a:r>
+              <a:t>-FL32-U3201</a:t>
+            </a:r>
+          </a:p>
+          <a:p>
             <a:r>
               <a:rPr sz="700" b="0" i="0">
                 <a:solidFill>
@@ -6823,25 +6523,26 @@
                 </a:solidFill>
                 <a:latin typeface="Arial"/>
               </a:rPr>
-              <a:t>   4BHK Luxury · 318 m² · East</a:t>
+              <a:t>  4BHK Luxury | 318 m² | East</a:t>
             </a:r>
           </a:p>
           <a:p>
             <a:pPr>
               <a:spcBef>
-                <a:spcPts val="300"/>
+                <a:spcPts val="400"/>
               </a:spcBef>
             </a:pPr>
             <a:r>
-              <a:rPr sz="750" b="1" i="0">
+              <a:rPr sz="780" b="1" i="0">
                 <a:solidFill>
                   <a:srgbClr val="FFFFFF"/>
                 </a:solidFill>
                 <a:latin typeface="Arial"/>
               </a:rPr>
-              <a:t>▸ -FL32-U3202
-</a:t>
-            </a:r>
+              <a:t>-FL32-U3202</a:t>
+            </a:r>
+          </a:p>
+          <a:p>
             <a:r>
               <a:rPr sz="700" b="0" i="0">
                 <a:solidFill>
@@ -6849,25 +6550,26 @@
                 </a:solidFill>
                 <a:latin typeface="Arial"/>
               </a:rPr>
-              <a:t>   3BHK Premium · 241 m² · West</a:t>
+              <a:t>  3BHK Premium | 241 m² | West</a:t>
             </a:r>
           </a:p>
           <a:p>
             <a:pPr>
               <a:spcBef>
-                <a:spcPts val="300"/>
+                <a:spcPts val="400"/>
               </a:spcBef>
             </a:pPr>
             <a:r>
-              <a:rPr sz="750" b="1" i="0">
+              <a:rPr sz="780" b="1" i="0">
                 <a:solidFill>
                   <a:srgbClr val="FFFFFF"/>
                 </a:solidFill>
                 <a:latin typeface="Arial"/>
               </a:rPr>
-              <a:t>▸ -FL32-U3203
-</a:t>
-            </a:r>
+              <a:t>-FL32-U3203</a:t>
+            </a:r>
+          </a:p>
+          <a:p>
             <a:r>
               <a:rPr sz="700" b="0" i="0">
                 <a:solidFill>
@@ -6875,25 +6577,26 @@
                 </a:solidFill>
                 <a:latin typeface="Arial"/>
               </a:rPr>
-              <a:t>   3BHK Premium · 241 m² · North</a:t>
+              <a:t>  3BHK Premium | 241 m² | North</a:t>
             </a:r>
           </a:p>
           <a:p>
             <a:pPr>
               <a:spcBef>
-                <a:spcPts val="300"/>
+                <a:spcPts val="400"/>
               </a:spcBef>
             </a:pPr>
             <a:r>
-              <a:rPr sz="750" b="1" i="0">
+              <a:rPr sz="780" b="1" i="0">
                 <a:solidFill>
                   <a:srgbClr val="FFFFFF"/>
                 </a:solidFill>
                 <a:latin typeface="Arial"/>
               </a:rPr>
-              <a:t>▸ -FL32-ULOBBY
-</a:t>
-            </a:r>
+              <a:t>-FL32-ULOBBY</a:t>
+            </a:r>
+          </a:p>
+          <a:p>
             <a:r>
               <a:rPr sz="700" b="0" i="0">
                 <a:solidFill>
@@ -6901,64 +6604,21 @@
                 </a:solidFill>
                 <a:latin typeface="Arial"/>
               </a:rPr>
-              <a:t>   Common Area · Lift &amp; Fire · 85 m²</a:t>
-            </a:r>
-          </a:p>
-        </p:txBody>
-      </p:sp>
-      <p:sp>
-        <p:nvSpPr>
-          <p:cNvPr id="15372" name="Rectangle 15371"/>
+              <a:t>  Common Area | Lift &amp; Fire | 85 m²</a:t>
+            </a:r>
+          </a:p>
+        </p:txBody>
+      </p:sp>
+      <p:sp>
+        <p:nvSpPr>
+          <p:cNvPr id="15365" name="Rounded Rectangle 15364"/>
           <p:cNvSpPr/>
           <p:nvPr/>
         </p:nvSpPr>
         <p:spPr>
           <a:xfrm>
-            <a:off x="7040880" y="2898648"/>
-            <a:ext cx="2084831" cy="36576"/>
-          </a:xfrm>
-          <a:prstGeom prst="rect">
-            <a:avLst/>
-          </a:prstGeom>
-          <a:solidFill>
-            <a:srgbClr val="34D399"/>
-          </a:solidFill>
-          <a:ln>
-            <a:noFill/>
-          </a:ln>
-        </p:spPr>
-        <p:style>
-          <a:lnRef idx="1">
-            <a:schemeClr val="accent1"/>
-          </a:lnRef>
-          <a:fillRef idx="3">
-            <a:schemeClr val="accent1"/>
-          </a:fillRef>
-          <a:effectRef idx="2">
-            <a:schemeClr val="accent1"/>
-          </a:effectRef>
-          <a:fontRef idx="minor">
-            <a:schemeClr val="lt1"/>
-          </a:fontRef>
-        </p:style>
-        <p:txBody>
-          <a:bodyPr rtlCol="0" anchor="ctr"/>
-          <a:lstStyle/>
-          <a:p>
-            <a:pPr algn="ctr"/>
-          </a:p>
-        </p:txBody>
-      </p:sp>
-      <p:sp>
-        <p:nvSpPr>
-          <p:cNvPr id="15373" name="Rounded Rectangle 15372"/>
-          <p:cNvSpPr/>
-          <p:nvPr/>
-        </p:nvSpPr>
-        <p:spPr>
-          <a:xfrm>
-            <a:off x="9390888" y="2852928"/>
-            <a:ext cx="2267712" cy="3090672"/>
+            <a:off x="9372600" y="2487168"/>
+            <a:ext cx="2286000" cy="3456432"/>
           </a:xfrm>
           <a:prstGeom prst="roundRect">
             <a:avLst/>
@@ -6987,7 +6647,7 @@
           </a:fontRef>
         </p:style>
         <p:txBody>
-          <a:bodyPr rtlCol="0" anchor="ctr" wrap="square" tIns="91440" bIns="91440"/>
+          <a:bodyPr rtlCol="0" anchor="ctr" wrap="square" tIns="109728" bIns="91440"/>
           <a:lstStyle/>
           <a:p>
             <a:pPr algn="ctr"/>
@@ -7004,7 +6664,7 @@
           <a:p>
             <a:pPr algn="ctr">
               <a:spcAft>
-                <a:spcPts val="300"/>
+                <a:spcPts val="400"/>
               </a:spcAft>
             </a:pPr>
             <a:r>
@@ -7014,25 +6674,26 @@
                 </a:solidFill>
                 <a:latin typeface="Arial"/>
               </a:rPr>
-              <a:t>(Automated Height Slicing)</a:t>
+              <a:t>Automated Height Slicing</a:t>
             </a:r>
           </a:p>
           <a:p>
             <a:pPr>
               <a:spcBef>
-                <a:spcPts val="300"/>
+                <a:spcPts val="400"/>
               </a:spcBef>
             </a:pPr>
             <a:r>
-              <a:rPr sz="750" b="1" i="0">
+              <a:rPr sz="780" b="1" i="0">
                 <a:solidFill>
                   <a:srgbClr val="FFFFFF"/>
                 </a:solidFill>
                 <a:latin typeface="Arial"/>
               </a:rPr>
-              <a:t>▸ -FL32
-</a:t>
-            </a:r>
+              <a:t>-FL32</a:t>
+            </a:r>
+          </a:p>
+          <a:p>
             <a:r>
               <a:rPr sz="700" b="0" i="0">
                 <a:solidFill>
@@ -7040,25 +6701,26 @@
                 </a:solidFill>
                 <a:latin typeface="Arial"/>
               </a:rPr>
-              <a:t>   Floor 32 · Z: 691.01m – 694.00m MSL</a:t>
+              <a:t>  Floor 32 | Z: 691.01 – 694.00m MSL</a:t>
             </a:r>
           </a:p>
           <a:p>
             <a:pPr>
               <a:spcBef>
-                <a:spcPts val="300"/>
+                <a:spcPts val="400"/>
               </a:spcBef>
             </a:pPr>
             <a:r>
-              <a:rPr sz="750" b="1" i="0">
+              <a:rPr sz="780" b="1" i="0">
                 <a:solidFill>
                   <a:srgbClr val="FFFFFF"/>
                 </a:solidFill>
                 <a:latin typeface="Arial"/>
               </a:rPr>
-              <a:t>▸ -FL15
-</a:t>
-            </a:r>
+              <a:t>-FL15</a:t>
+            </a:r>
+          </a:p>
+          <a:p>
             <a:r>
               <a:rPr sz="700" b="0" i="0">
                 <a:solidFill>
@@ -7066,25 +6728,26 @@
                 </a:solidFill>
                 <a:latin typeface="Arial"/>
               </a:rPr>
-              <a:t>   Floor 15 · Z: 639.75m – 642.75m MSL</a:t>
+              <a:t>  Floor 15 | Z: 639.75 – 642.75m MSL</a:t>
             </a:r>
           </a:p>
           <a:p>
             <a:pPr>
               <a:spcBef>
-                <a:spcPts val="300"/>
+                <a:spcPts val="400"/>
               </a:spcBef>
             </a:pPr>
             <a:r>
-              <a:rPr sz="750" b="1" i="0">
+              <a:rPr sz="780" b="1" i="0">
                 <a:solidFill>
                   <a:srgbClr val="FFFFFF"/>
                 </a:solidFill>
                 <a:latin typeface="Arial"/>
               </a:rPr>
-              <a:t>▸ -FL08
-</a:t>
-            </a:r>
+              <a:t>-FL08</a:t>
+            </a:r>
+          </a:p>
+          <a:p>
             <a:r>
               <a:rPr sz="700" b="0" i="0">
                 <a:solidFill>
@@ -7092,25 +6755,26 @@
                 </a:solidFill>
                 <a:latin typeface="Arial"/>
               </a:rPr>
-              <a:t>   Floor 8 · Z: 618.34m – 621.34m MSL</a:t>
+              <a:t>  Floor 8 | Z: 618.34 – 621.34m MSL</a:t>
             </a:r>
           </a:p>
           <a:p>
             <a:pPr>
               <a:spcBef>
-                <a:spcPts val="300"/>
+                <a:spcPts val="400"/>
               </a:spcBef>
             </a:pPr>
             <a:r>
-              <a:rPr sz="750" b="1" i="0">
+              <a:rPr sz="780" b="1" i="0">
                 <a:solidFill>
                   <a:srgbClr val="FFFFFF"/>
                 </a:solidFill>
                 <a:latin typeface="Arial"/>
               </a:rPr>
-              <a:t>▸ -FL00
-</a:t>
-            </a:r>
+              <a:t>-FL00</a:t>
+            </a:r>
+          </a:p>
+          <a:p>
             <a:r>
               <a:rPr sz="700" b="0" i="0">
                 <a:solidFill>
@@ -7118,51 +6782,8 @@
                 </a:solidFill>
                 <a:latin typeface="Arial"/>
               </a:rPr>
-              <a:t>   Ground · Z: 594.00m – 598.34m MSL</a:t>
-            </a:r>
-          </a:p>
-        </p:txBody>
-      </p:sp>
-      <p:sp>
-        <p:nvSpPr>
-          <p:cNvPr id="15374" name="Rectangle 15373"/>
-          <p:cNvSpPr/>
-          <p:nvPr/>
-        </p:nvSpPr>
-        <p:spPr>
-          <a:xfrm>
-            <a:off x="9482328" y="2898648"/>
-            <a:ext cx="2084831" cy="36576"/>
-          </a:xfrm>
-          <a:prstGeom prst="rect">
-            <a:avLst/>
-          </a:prstGeom>
-          <a:solidFill>
-            <a:srgbClr val="818CF8"/>
-          </a:solidFill>
-          <a:ln>
-            <a:noFill/>
-          </a:ln>
-        </p:spPr>
-        <p:style>
-          <a:lnRef idx="1">
-            <a:schemeClr val="accent1"/>
-          </a:lnRef>
-          <a:fillRef idx="3">
-            <a:schemeClr val="accent1"/>
-          </a:fillRef>
-          <a:effectRef idx="2">
-            <a:schemeClr val="accent1"/>
-          </a:effectRef>
-          <a:fontRef idx="minor">
-            <a:schemeClr val="lt1"/>
-          </a:fontRef>
-        </p:style>
-        <p:txBody>
-          <a:bodyPr rtlCol="0" anchor="ctr"/>
-          <a:lstStyle/>
-          <a:p>
-            <a:pPr algn="ctr"/>
+              <a:t>  Ground | Z: 594.00 – 598.34m MSL</a:t>
+            </a:r>
           </a:p>
         </p:txBody>
       </p:sp>
@@ -7411,7 +7032,7 @@
           <a:p>
             <a:pPr algn="ctr"/>
             <a:r>
-              <a:rPr sz="1200" b="1">
+              <a:rPr sz="1200" b="1" i="0">
                 <a:solidFill>
                   <a:srgbClr val="FFFFFF"/>
                 </a:solidFill>
@@ -7424,7 +7045,7 @@
           <a:p>
             <a:pPr algn="ctr"/>
             <a:r>
-              <a:rPr sz="850" b="0">
+              <a:rPr sz="850" b="0" i="0">
                 <a:solidFill>
                   <a:srgbClr val="A5B4FC"/>
                 </a:solidFill>
@@ -7474,7 +7095,7 @@
         <p:spPr>
           <a:xfrm>
             <a:off x="502920" y="1143000"/>
-            <a:ext cx="2697480" cy="2267712"/>
+            <a:ext cx="2697480" cy="2148840"/>
           </a:xfrm>
           <a:prstGeom prst="roundRect">
             <a:avLst/>
@@ -7519,7 +7140,7 @@
         <p:spPr>
           <a:xfrm>
             <a:off x="557784" y="1197864"/>
-            <a:ext cx="2587752" cy="502920"/>
+            <a:ext cx="2587752" cy="384048"/>
           </a:xfrm>
           <a:prstGeom prst="roundRect">
             <a:avLst/>
@@ -7546,30 +7167,18 @@
           </a:fontRef>
         </p:style>
         <p:txBody>
-          <a:bodyPr rtlCol="0" anchor="ctr" lIns="73152"/>
+          <a:bodyPr rtlCol="0" anchor="ctr"/>
           <a:lstStyle/>
           <a:p>
             <a:pPr algn="ctr"/>
             <a:r>
-              <a:rPr sz="800" b="1" i="0">
+              <a:rPr sz="900" b="1" i="0">
                 <a:solidFill>
                   <a:srgbClr val="FFFFFF"/>
                 </a:solidFill>
                 <a:latin typeface="Arial"/>
               </a:rPr>
-              <a:t>📡 STAGE 1</a:t>
-            </a:r>
-          </a:p>
-          <a:p>
-            <a:pPr algn="ctr"/>
-            <a:r>
-              <a:rPr sz="950" b="1" i="0">
-                <a:solidFill>
-                  <a:srgbClr val="FFFFFF"/>
-                </a:solidFill>
-                <a:latin typeface="Arial"/>
-              </a:rPr>
-              <a:t>DATA INGESTION</a:t>
+              <a:t>STAGE 1: DATA INGESTION</a:t>
             </a:r>
           </a:p>
         </p:txBody>
@@ -7582,8 +7191,8 @@
         </p:nvSpPr>
         <p:spPr>
           <a:xfrm>
-            <a:off x="576072" y="1746504"/>
-            <a:ext cx="2551176" cy="1609344"/>
+            <a:off x="576072" y="1636776"/>
+            <a:ext cx="2551176" cy="1600200"/>
           </a:xfrm>
           <a:prstGeom prst="rect">
             <a:avLst/>
@@ -7598,7 +7207,7 @@
           <a:p>
             <a:pPr>
               <a:spcAft>
-                <a:spcPts val="350"/>
+                <a:spcPts val="300"/>
               </a:spcAft>
             </a:pPr>
             <a:r>
@@ -7608,13 +7217,13 @@
                 </a:solidFill>
                 <a:latin typeface="Arial"/>
               </a:rPr>
-              <a:t>• OpenStreetMap (Overpass QL)</a:t>
+              <a:t>OpenStreetMap (Overpass QL)</a:t>
             </a:r>
           </a:p>
           <a:p>
             <a:pPr>
               <a:spcAft>
-                <a:spcPts val="350"/>
+                <a:spcPts val="300"/>
               </a:spcAft>
             </a:pPr>
             <a:r>
@@ -7624,13 +7233,13 @@
                 </a:solidFill>
                 <a:latin typeface="Arial"/>
               </a:rPr>
-              <a:t>• Copernicus GLO-30 DSM (AWS)</a:t>
+              <a:t>Copernicus GLO-30 DSM</a:t>
             </a:r>
           </a:p>
           <a:p>
             <a:pPr>
               <a:spcAft>
-                <a:spcPts val="350"/>
+                <a:spcPts val="300"/>
               </a:spcAft>
             </a:pPr>
             <a:r>
@@ -7640,13 +7249,13 @@
                 </a:solidFill>
                 <a:latin typeface="Arial"/>
               </a:rPr>
-              <a:t>• SRTM GL1 DEM (OpenTopo)</a:t>
+              <a:t>SRTM GL1 DEM (OpenTopo)</a:t>
             </a:r>
           </a:p>
           <a:p>
             <a:pPr>
               <a:spcAft>
-                <a:spcPts val="350"/>
+                <a:spcPts val="300"/>
               </a:spcAft>
             </a:pPr>
             <a:r>
@@ -7656,13 +7265,13 @@
                 </a:solidFill>
                 <a:latin typeface="Arial"/>
               </a:rPr>
-              <a:t>• ISRO Bhuvan OGC Geoportal</a:t>
+              <a:t>ISRO Bhuvan OGC Geoportal</a:t>
             </a:r>
           </a:p>
           <a:p>
             <a:pPr>
               <a:spcAft>
-                <a:spcPts val="350"/>
+                <a:spcPts val="300"/>
               </a:spcAft>
             </a:pPr>
             <a:r>
@@ -7672,7 +7281,7 @@
                 </a:solidFill>
                 <a:latin typeface="Arial"/>
               </a:rPr>
-              <a:t>• TS-RERA &amp; Dharani Land DB</a:t>
+              <a:t>TS-RERA &amp; Dharani Land DB</a:t>
             </a:r>
           </a:p>
         </p:txBody>
@@ -7685,8 +7294,8 @@
         </p:nvSpPr>
         <p:spPr>
           <a:xfrm>
-            <a:off x="3218688" y="2258568"/>
-            <a:ext cx="100584" cy="137160"/>
+            <a:off x="3218688" y="2199132"/>
+            <a:ext cx="100584" cy="128016"/>
           </a:xfrm>
           <a:prstGeom prst="rightArrow">
             <a:avLst/>
@@ -7729,7 +7338,7 @@
         <p:spPr>
           <a:xfrm>
             <a:off x="3337560" y="1143000"/>
-            <a:ext cx="2697480" cy="2267712"/>
+            <a:ext cx="2697480" cy="2148840"/>
           </a:xfrm>
           <a:prstGeom prst="roundRect">
             <a:avLst/>
@@ -7774,7 +7383,7 @@
         <p:spPr>
           <a:xfrm>
             <a:off x="3392424" y="1197864"/>
-            <a:ext cx="2587752" cy="502920"/>
+            <a:ext cx="2587752" cy="384048"/>
           </a:xfrm>
           <a:prstGeom prst="roundRect">
             <a:avLst/>
@@ -7801,30 +7410,18 @@
           </a:fontRef>
         </p:style>
         <p:txBody>
-          <a:bodyPr rtlCol="0" anchor="ctr" lIns="73152"/>
+          <a:bodyPr rtlCol="0" anchor="ctr"/>
           <a:lstStyle/>
           <a:p>
             <a:pPr algn="ctr"/>
             <a:r>
-              <a:rPr sz="800" b="1" i="0">
+              <a:rPr sz="900" b="1" i="0">
                 <a:solidFill>
                   <a:srgbClr val="FFFFFF"/>
                 </a:solidFill>
                 <a:latin typeface="Arial"/>
               </a:rPr>
-              <a:t>📐 STAGE 2</a:t>
-            </a:r>
-          </a:p>
-          <a:p>
-            <a:pPr algn="ctr"/>
-            <a:r>
-              <a:rPr sz="950" b="1" i="0">
-                <a:solidFill>
-                  <a:srgbClr val="FFFFFF"/>
-                </a:solidFill>
-                <a:latin typeface="Arial"/>
-              </a:rPr>
-              <a:t>5-TIER HEIGHT ENGINE</a:t>
+              <a:t>STAGE 2: HEIGHT ENGINE</a:t>
             </a:r>
           </a:p>
         </p:txBody>
@@ -7837,8 +7434,8 @@
         </p:nvSpPr>
         <p:spPr>
           <a:xfrm>
-            <a:off x="3410712" y="1746504"/>
-            <a:ext cx="2551176" cy="1609344"/>
+            <a:off x="3410712" y="1636776"/>
+            <a:ext cx="2551176" cy="1600200"/>
           </a:xfrm>
           <a:prstGeom prst="rect">
             <a:avLst/>
@@ -7853,7 +7450,7 @@
           <a:p>
             <a:pPr>
               <a:spcAft>
-                <a:spcPts val="350"/>
+                <a:spcPts val="300"/>
               </a:spcAft>
             </a:pPr>
             <a:r>
@@ -7863,13 +7460,13 @@
                 </a:solidFill>
                 <a:latin typeface="Arial"/>
               </a:rPr>
-              <a:t>• 1. Landmark / RERA Registry</a:t>
+              <a:t>Landmark / RERA Registry</a:t>
             </a:r>
           </a:p>
           <a:p>
             <a:pPr>
               <a:spcAft>
-                <a:spcPts val="350"/>
+                <a:spcPts val="300"/>
               </a:spcAft>
             </a:pPr>
             <a:r>
@@ -7879,13 +7476,13 @@
                 </a:solidFill>
                 <a:latin typeface="Arial"/>
               </a:rPr>
-              <a:t>• 2. DSM-DEM Zonal Statistics</a:t>
+              <a:t>DSM-DEM Zonal Statistics</a:t>
             </a:r>
           </a:p>
           <a:p>
             <a:pPr>
               <a:spcAft>
-                <a:spcPts val="350"/>
+                <a:spcPts val="300"/>
               </a:spcAft>
             </a:pPr>
             <a:r>
@@ -7895,13 +7492,13 @@
                 </a:solidFill>
                 <a:latin typeface="Arial"/>
               </a:rPr>
-              <a:t>• 3. Annular Buffer Sampling</a:t>
+              <a:t>Annular Buffer Sampling</a:t>
             </a:r>
           </a:p>
           <a:p>
             <a:pPr>
               <a:spcAft>
-                <a:spcPts val="350"/>
+                <a:spcPts val="300"/>
               </a:spcAft>
             </a:pPr>
             <a:r>
@@ -7911,13 +7508,13 @@
                 </a:solidFill>
                 <a:latin typeface="Arial"/>
               </a:rPr>
-              <a:t>• 4. Morphological Typology</a:t>
+              <a:t>Morphological Typology</a:t>
             </a:r>
           </a:p>
           <a:p>
             <a:pPr>
               <a:spcAft>
-                <a:spcPts val="350"/>
+                <a:spcPts val="300"/>
               </a:spcAft>
             </a:pPr>
             <a:r>
@@ -7927,7 +7524,7 @@
                 </a:solidFill>
                 <a:latin typeface="Arial"/>
               </a:rPr>
-              <a:t>• 5. Cluster Spatial Propagation</a:t>
+              <a:t>Cluster Spatial Propagation</a:t>
             </a:r>
           </a:p>
         </p:txBody>
@@ -7940,8 +7537,8 @@
         </p:nvSpPr>
         <p:spPr>
           <a:xfrm>
-            <a:off x="6053328" y="2258568"/>
-            <a:ext cx="100584" cy="137160"/>
+            <a:off x="6053328" y="2199132"/>
+            <a:ext cx="100584" cy="128016"/>
           </a:xfrm>
           <a:prstGeom prst="rightArrow">
             <a:avLst/>
@@ -7984,7 +7581,7 @@
         <p:spPr>
           <a:xfrm>
             <a:off x="6172200" y="1143000"/>
-            <a:ext cx="2697480" cy="2267712"/>
+            <a:ext cx="2697480" cy="2148840"/>
           </a:xfrm>
           <a:prstGeom prst="roundRect">
             <a:avLst/>
@@ -8029,7 +7626,7 @@
         <p:spPr>
           <a:xfrm>
             <a:off x="6227064" y="1197864"/>
-            <a:ext cx="2587752" cy="502920"/>
+            <a:ext cx="2587752" cy="384048"/>
           </a:xfrm>
           <a:prstGeom prst="roundRect">
             <a:avLst/>
@@ -8056,30 +7653,18 @@
           </a:fontRef>
         </p:style>
         <p:txBody>
-          <a:bodyPr rtlCol="0" anchor="ctr" lIns="73152"/>
+          <a:bodyPr rtlCol="0" anchor="ctr"/>
           <a:lstStyle/>
           <a:p>
             <a:pPr algn="ctr"/>
             <a:r>
-              <a:rPr sz="800" b="1" i="0">
+              <a:rPr sz="900" b="1" i="0">
                 <a:solidFill>
                   <a:srgbClr val="FFFFFF"/>
                 </a:solidFill>
                 <a:latin typeface="Arial"/>
               </a:rPr>
-              <a:t>🏗 STAGE 3</a:t>
-            </a:r>
-          </a:p>
-          <a:p>
-            <a:pPr algn="ctr"/>
-            <a:r>
-              <a:rPr sz="950" b="1" i="0">
-                <a:solidFill>
-                  <a:srgbClr val="FFFFFF"/>
-                </a:solidFill>
-                <a:latin typeface="Arial"/>
-              </a:rPr>
-              <a:t>3D CADASTRE &amp; ULPIN</a:t>
+              <a:t>STAGE 3: 3D CADASTRE</a:t>
             </a:r>
           </a:p>
         </p:txBody>
@@ -8092,8 +7677,8 @@
         </p:nvSpPr>
         <p:spPr>
           <a:xfrm>
-            <a:off x="6245352" y="1746504"/>
-            <a:ext cx="2551176" cy="1609344"/>
+            <a:off x="6245352" y="1636776"/>
+            <a:ext cx="2551176" cy="1600200"/>
           </a:xfrm>
           <a:prstGeom prst="rect">
             <a:avLst/>
@@ -8108,7 +7693,7 @@
           <a:p>
             <a:pPr>
               <a:spcAft>
-                <a:spcPts val="350"/>
+                <a:spcPts val="300"/>
               </a:spcAft>
             </a:pPr>
             <a:r>
@@ -8118,13 +7703,13 @@
                 </a:solidFill>
                 <a:latin typeface="Arial"/>
               </a:rPr>
-              <a:t>• 14-Digit 2D Bhu-Aadhaar (NIC)</a:t>
+              <a:t>14-Digit Bhu-Aadhaar (NIC)</a:t>
             </a:r>
           </a:p>
           <a:p>
             <a:pPr>
               <a:spcAft>
-                <a:spcPts val="350"/>
+                <a:spcPts val="300"/>
               </a:spcAft>
             </a:pPr>
             <a:r>
@@ -8134,13 +7719,13 @@
                 </a:solidFill>
                 <a:latin typeface="Arial"/>
               </a:rPr>
-              <a:t>• Unit 3D ULPIN (-FLxx-Uyyyy)</a:t>
+              <a:t>Unit ULPIN (-FLxx-Uyyyy)</a:t>
             </a:r>
           </a:p>
           <a:p>
             <a:pPr>
               <a:spcAft>
-                <a:spcPts val="350"/>
+                <a:spcPts val="300"/>
               </a:spcAft>
             </a:pPr>
             <a:r>
@@ -8150,13 +7735,13 @@
                 </a:solidFill>
                 <a:latin typeface="Arial"/>
               </a:rPr>
-              <a:t>• Floor 3D ULPIN (-FLxx)</a:t>
+              <a:t>Floor ULPIN (-FLxx)</a:t>
             </a:r>
           </a:p>
           <a:p>
             <a:pPr>
               <a:spcAft>
-                <a:spcPts val="350"/>
+                <a:spcPts val="300"/>
               </a:spcAft>
             </a:pPr>
             <a:r>
@@ -8166,13 +7751,13 @@
                 </a:solidFill>
                 <a:latin typeface="Arial"/>
               </a:rPr>
-              <a:t>• Zero-Discrepancy Normalizer</a:t>
+              <a:t>Zero-Discrepancy Normalizer</a:t>
             </a:r>
           </a:p>
           <a:p>
             <a:pPr>
               <a:spcAft>
-                <a:spcPts val="350"/>
+                <a:spcPts val="300"/>
               </a:spcAft>
             </a:pPr>
             <a:r>
@@ -8182,7 +7767,7 @@
                 </a:solidFill>
                 <a:latin typeface="Arial"/>
               </a:rPr>
-              <a:t>• ISO 19152 LADM / CityGML 3.0</a:t>
+              <a:t>ISO 19152 / CityGML 3.0</a:t>
             </a:r>
           </a:p>
         </p:txBody>
@@ -8195,8 +7780,8 @@
         </p:nvSpPr>
         <p:spPr>
           <a:xfrm>
-            <a:off x="8887968" y="2258568"/>
-            <a:ext cx="100584" cy="137160"/>
+            <a:off x="8887968" y="2199132"/>
+            <a:ext cx="100584" cy="128016"/>
           </a:xfrm>
           <a:prstGeom prst="rightArrow">
             <a:avLst/>
@@ -8239,7 +7824,7 @@
         <p:spPr>
           <a:xfrm>
             <a:off x="9006840" y="1143000"/>
-            <a:ext cx="2697480" cy="2267712"/>
+            <a:ext cx="2697480" cy="2148840"/>
           </a:xfrm>
           <a:prstGeom prst="roundRect">
             <a:avLst/>
@@ -8284,7 +7869,7 @@
         <p:spPr>
           <a:xfrm>
             <a:off x="9061704" y="1197864"/>
-            <a:ext cx="2587752" cy="502920"/>
+            <a:ext cx="2587752" cy="384048"/>
           </a:xfrm>
           <a:prstGeom prst="roundRect">
             <a:avLst/>
@@ -8311,30 +7896,18 @@
           </a:fontRef>
         </p:style>
         <p:txBody>
-          <a:bodyPr rtlCol="0" anchor="ctr" lIns="73152"/>
+          <a:bodyPr rtlCol="0" anchor="ctr"/>
           <a:lstStyle/>
           <a:p>
             <a:pPr algn="ctr"/>
             <a:r>
-              <a:rPr sz="800" b="1" i="0">
+              <a:rPr sz="900" b="1" i="0">
                 <a:solidFill>
                   <a:srgbClr val="FFFFFF"/>
                 </a:solidFill>
                 <a:latin typeface="Arial"/>
               </a:rPr>
-              <a:t>🌐 STAGE 4</a:t>
-            </a:r>
-          </a:p>
-          <a:p>
-            <a:pPr algn="ctr"/>
-            <a:r>
-              <a:rPr sz="950" b="1" i="0">
-                <a:solidFill>
-                  <a:srgbClr val="FFFFFF"/>
-                </a:solidFill>
-                <a:latin typeface="Arial"/>
-              </a:rPr>
-              <a:t>3D DIGITAL TWIN</a:t>
+              <a:t>STAGE 4: DIGITAL TWIN</a:t>
             </a:r>
           </a:p>
         </p:txBody>
@@ -8347,8 +7920,8 @@
         </p:nvSpPr>
         <p:spPr>
           <a:xfrm>
-            <a:off x="9079992" y="1746504"/>
-            <a:ext cx="2551176" cy="1609344"/>
+            <a:off x="9079992" y="1636776"/>
+            <a:ext cx="2551176" cy="1600200"/>
           </a:xfrm>
           <a:prstGeom prst="rect">
             <a:avLst/>
@@ -8363,7 +7936,7 @@
           <a:p>
             <a:pPr>
               <a:spcAft>
-                <a:spcPts val="350"/>
+                <a:spcPts val="300"/>
               </a:spcAft>
             </a:pPr>
             <a:r>
@@ -8373,13 +7946,13 @@
                 </a:solidFill>
                 <a:latin typeface="Arial"/>
               </a:rPr>
-              <a:t>• Next.js 16 + React 19 + Three.js</a:t>
+              <a:t>Next.js 16 + Three.js r185</a:t>
             </a:r>
           </a:p>
           <a:p>
             <a:pPr>
               <a:spcAft>
-                <a:spcPts val="350"/>
+                <a:spcPts val="300"/>
               </a:spcAft>
             </a:pPr>
             <a:r>
@@ -8389,13 +7962,13 @@
                 </a:solidFill>
                 <a:latin typeface="Arial"/>
               </a:rPr>
-              <a:t>• 60 FPS BatchedMesh / LOD</a:t>
+              <a:t>60 FPS BatchedMesh / LOD</a:t>
             </a:r>
           </a:p>
           <a:p>
             <a:pPr>
               <a:spcAft>
-                <a:spcPts val="350"/>
+                <a:spcPts val="300"/>
               </a:spcAft>
             </a:pPr>
             <a:r>
@@ -8405,13 +7978,13 @@
                 </a:solidFill>
                 <a:latin typeface="Arial"/>
               </a:rPr>
-              <a:t>• Interactive Floor Isolation</a:t>
+              <a:t>Interactive Floor Isolation</a:t>
             </a:r>
           </a:p>
           <a:p>
             <a:pPr>
               <a:spcAft>
-                <a:spcPts val="350"/>
+                <a:spcPts val="300"/>
               </a:spcAft>
             </a:pPr>
             <a:r>
@@ -8421,13 +7994,13 @@
                 </a:solidFill>
                 <a:latin typeface="Arial"/>
               </a:rPr>
-              <a:t>• Solar &amp; Flood Simulation</a:t>
+              <a:t>Solar &amp; Flood Simulation</a:t>
             </a:r>
           </a:p>
           <a:p>
             <a:pPr>
               <a:spcAft>
-                <a:spcPts val="350"/>
+                <a:spcPts val="300"/>
               </a:spcAft>
             </a:pPr>
             <a:r>
@@ -8437,7 +8010,7 @@
                 </a:solidFill>
                 <a:latin typeface="Arial"/>
               </a:rPr>
-              <a:t>• 3D Flyovers &amp; Road Network</a:t>
+              <a:t>238 km Road Network</a:t>
             </a:r>
           </a:p>
         </p:txBody>
@@ -8450,8 +8023,8 @@
         </p:nvSpPr>
         <p:spPr>
           <a:xfrm>
-            <a:off x="502920" y="3529584"/>
-            <a:ext cx="2168956" cy="548640"/>
+            <a:off x="502920" y="3401568"/>
+            <a:ext cx="2190902" cy="530352"/>
           </a:xfrm>
           <a:prstGeom prst="roundRect">
             <a:avLst/>
@@ -8480,7 +8053,7 @@
           </a:fontRef>
         </p:style>
         <p:txBody>
-          <a:bodyPr rtlCol="0" anchor="ctr" wrap="square" lIns="73152" rIns="73152"/>
+          <a:bodyPr rtlCol="0" anchor="ctr" wrap="square" lIns="54864" rIns="54864"/>
           <a:lstStyle/>
           <a:p>
             <a:pPr algn="ctr"/>
@@ -8503,7 +8076,7 @@
                 </a:solidFill>
                 <a:latin typeface="Arial"/>
               </a:rPr>
-              <a:t>Buildings Processed</a:t>
+              <a:t>Buildings</a:t>
             </a:r>
           </a:p>
         </p:txBody>
@@ -8516,8 +8089,8 @@
         </p:nvSpPr>
         <p:spPr>
           <a:xfrm>
-            <a:off x="2809036" y="3529584"/>
-            <a:ext cx="2168956" cy="548640"/>
+            <a:off x="2803550" y="3401568"/>
+            <a:ext cx="2190902" cy="530352"/>
           </a:xfrm>
           <a:prstGeom prst="roundRect">
             <a:avLst/>
@@ -8546,7 +8119,7 @@
           </a:fontRef>
         </p:style>
         <p:txBody>
-          <a:bodyPr rtlCol="0" anchor="ctr" wrap="square" lIns="73152" rIns="73152"/>
+          <a:bodyPr rtlCol="0" anchor="ctr" wrap="square" lIns="54864" rIns="54864"/>
           <a:lstStyle/>
           <a:p>
             <a:pPr algn="ctr"/>
@@ -8569,7 +8142,7 @@
                 </a:solidFill>
                 <a:latin typeface="Arial"/>
               </a:rPr>
-              <a:t>3D Vertical Parcels</a:t>
+              <a:t>3D Parcels</a:t>
             </a:r>
           </a:p>
         </p:txBody>
@@ -8582,8 +8155,8 @@
         </p:nvSpPr>
         <p:spPr>
           <a:xfrm>
-            <a:off x="5115153" y="3529584"/>
-            <a:ext cx="2168956" cy="548640"/>
+            <a:off x="5104180" y="3401568"/>
+            <a:ext cx="2190902" cy="530352"/>
           </a:xfrm>
           <a:prstGeom prst="roundRect">
             <a:avLst/>
@@ -8612,7 +8185,7 @@
           </a:fontRef>
         </p:style>
         <p:txBody>
-          <a:bodyPr rtlCol="0" anchor="ctr" wrap="square" lIns="73152" rIns="73152"/>
+          <a:bodyPr rtlCol="0" anchor="ctr" wrap="square" lIns="54864" rIns="54864"/>
           <a:lstStyle/>
           <a:p>
             <a:pPr algn="ctr"/>
@@ -8635,7 +8208,7 @@
                 </a:solidFill>
                 <a:latin typeface="Arial"/>
               </a:rPr>
-              <a:t>Road Network</a:t>
+              <a:t>Roads</a:t>
             </a:r>
           </a:p>
         </p:txBody>
@@ -8648,8 +8221,8 @@
         </p:nvSpPr>
         <p:spPr>
           <a:xfrm>
-            <a:off x="7421270" y="3529584"/>
-            <a:ext cx="2168956" cy="548640"/>
+            <a:off x="7404811" y="3401568"/>
+            <a:ext cx="2190902" cy="530352"/>
           </a:xfrm>
           <a:prstGeom prst="roundRect">
             <a:avLst/>
@@ -8678,7 +8251,7 @@
           </a:fontRef>
         </p:style>
         <p:txBody>
-          <a:bodyPr rtlCol="0" anchor="ctr" wrap="square" lIns="73152" rIns="73152"/>
+          <a:bodyPr rtlCol="0" anchor="ctr" wrap="square" lIns="54864" rIns="54864"/>
           <a:lstStyle/>
           <a:p>
             <a:pPr algn="ctr"/>
@@ -8701,7 +8274,7 @@
                 </a:solidFill>
                 <a:latin typeface="Arial"/>
               </a:rPr>
-              <a:t>Pipeline Execution</a:t>
+              <a:t>Execution</a:t>
             </a:r>
           </a:p>
         </p:txBody>
@@ -8714,8 +8287,8 @@
         </p:nvSpPr>
         <p:spPr>
           <a:xfrm>
-            <a:off x="9727387" y="3529584"/>
-            <a:ext cx="2168956" cy="548640"/>
+            <a:off x="9705441" y="3401568"/>
+            <a:ext cx="2190902" cy="530352"/>
           </a:xfrm>
           <a:prstGeom prst="roundRect">
             <a:avLst/>
@@ -8744,7 +8317,7 @@
           </a:fontRef>
         </p:style>
         <p:txBody>
-          <a:bodyPr rtlCol="0" anchor="ctr" wrap="square" lIns="73152" rIns="73152"/>
+          <a:bodyPr rtlCol="0" anchor="ctr" wrap="square" lIns="54864" rIns="54864"/>
           <a:lstStyle/>
           <a:p>
             <a:pPr algn="ctr"/>
@@ -8767,7 +8340,7 @@
                 </a:solidFill>
                 <a:latin typeface="Arial"/>
               </a:rPr>
-              <a:t>Rendering Speed</a:t>
+              <a:t>Rendering</a:t>
             </a:r>
           </a:p>
         </p:txBody>
@@ -8780,8 +8353,8 @@
         </p:nvSpPr>
         <p:spPr>
           <a:xfrm>
-            <a:off x="502920" y="4187952"/>
-            <a:ext cx="5577840" cy="1755648"/>
+            <a:off x="502920" y="4041648"/>
+            <a:ext cx="5577840" cy="1901952"/>
           </a:xfrm>
           <a:prstGeom prst="roundRect">
             <a:avLst/>
@@ -8835,13 +8408,13 @@
               </a:spcAft>
             </a:pPr>
             <a:r>
-              <a:rPr sz="880" b="1" i="0">
+              <a:rPr sz="900" b="1" i="0">
                 <a:solidFill>
                   <a:srgbClr val="0F172A"/>
                 </a:solidFill>
                 <a:latin typeface="Arial"/>
               </a:rPr>
-              <a:t>• Core Geospatial: </a:t>
+              <a:t>Geospatial: </a:t>
             </a:r>
             <a:r>
               <a:rPr sz="850" b="0" i="0">
@@ -8850,7 +8423,7 @@
                 </a:solidFill>
                 <a:latin typeface="Arial"/>
               </a:rPr>
-              <a:t>Python 3.10+, GDAL, Rasterio, Shapely, GeoPandas, PyProj, SciPy k-d trees, OpenTopography API.</a:t>
+              <a:t>Python 3.10+, GDAL, Rasterio, Shapely, GeoPandas, PyProj, SciPy k-d trees.</a:t>
             </a:r>
           </a:p>
           <a:p>
@@ -8860,13 +8433,13 @@
               </a:spcAft>
             </a:pPr>
             <a:r>
-              <a:rPr sz="880" b="1" i="0">
+              <a:rPr sz="900" b="1" i="0">
                 <a:solidFill>
                   <a:srgbClr val="0F172A"/>
                 </a:solidFill>
                 <a:latin typeface="Arial"/>
               </a:rPr>
-              <a:t>• Elevation &amp; Remote Sensing: </a:t>
+              <a:t>Remote Sensing: </a:t>
             </a:r>
             <a:r>
               <a:rPr sz="850" b="0" i="0">
@@ -8875,7 +8448,7 @@
                 </a:solidFill>
                 <a:latin typeface="Arial"/>
               </a:rPr>
-              <a:t>Copernicus GLO-30 DSM (30m), SRTM GL1 DEM, ISRO Bhuvan OGC WFS/WMS, OSM Overpass QL, TS-RERA.</a:t>
+              <a:t>Copernicus GLO-30 DSM, SRTM GL1 DEM, ISRO Bhuvan WFS/WMS, OSM Overpass QL.</a:t>
             </a:r>
           </a:p>
           <a:p>
@@ -8885,13 +8458,13 @@
               </a:spcAft>
             </a:pPr>
             <a:r>
-              <a:rPr sz="880" b="1" i="0">
+              <a:rPr sz="900" b="1" i="0">
                 <a:solidFill>
                   <a:srgbClr val="0F172A"/>
                 </a:solidFill>
                 <a:latin typeface="Arial"/>
               </a:rPr>
-              <a:t>• 3D Digital Twin Platform: </a:t>
+              <a:t>3D Platform: </a:t>
             </a:r>
             <a:r>
               <a:rPr sz="850" b="0" i="0">
@@ -8900,64 +8473,21 @@
                 </a:solidFill>
                 <a:latin typeface="Arial"/>
               </a:rPr>
-              <a:t>Next.js 16 (Turbopack), React 19, Three.js (r185), React Three Fiber, BatchedMesh / WebGL 2.0.</a:t>
-            </a:r>
-          </a:p>
-        </p:txBody>
-      </p:sp>
-      <p:sp>
-        <p:nvSpPr>
-          <p:cNvPr id="17431" name="Rectangle 17430"/>
+              <a:t>Next.js 16 (Turbopack), React 19, Three.js r185, React Three Fiber, WebGL 2.0.</a:t>
+            </a:r>
+          </a:p>
+        </p:txBody>
+      </p:sp>
+      <p:sp>
+        <p:nvSpPr>
+          <p:cNvPr id="17431" name="Rounded Rectangle 17430"/>
           <p:cNvSpPr/>
           <p:nvPr/>
         </p:nvSpPr>
         <p:spPr>
           <a:xfrm>
-            <a:off x="502920" y="4187952"/>
-            <a:ext cx="45720" cy="1755648"/>
-          </a:xfrm>
-          <a:prstGeom prst="rect">
-            <a:avLst/>
-          </a:prstGeom>
-          <a:solidFill>
-            <a:srgbClr val="0EA5E9"/>
-          </a:solidFill>
-          <a:ln>
-            <a:noFill/>
-          </a:ln>
-        </p:spPr>
-        <p:style>
-          <a:lnRef idx="1">
-            <a:schemeClr val="accent1"/>
-          </a:lnRef>
-          <a:fillRef idx="3">
-            <a:schemeClr val="accent1"/>
-          </a:fillRef>
-          <a:effectRef idx="2">
-            <a:schemeClr val="accent1"/>
-          </a:effectRef>
-          <a:fontRef idx="minor">
-            <a:schemeClr val="lt1"/>
-          </a:fontRef>
-        </p:style>
-        <p:txBody>
-          <a:bodyPr rtlCol="0" anchor="ctr"/>
-          <a:lstStyle/>
-          <a:p>
-            <a:pPr algn="ctr"/>
-          </a:p>
-        </p:txBody>
-      </p:sp>
-      <p:sp>
-        <p:nvSpPr>
-          <p:cNvPr id="17432" name="Rounded Rectangle 17431"/>
-          <p:cNvSpPr/>
-          <p:nvPr/>
-        </p:nvSpPr>
-        <p:spPr>
-          <a:xfrm>
-            <a:off x="6263640" y="4187952"/>
-            <a:ext cx="5632704" cy="1755648"/>
+            <a:off x="6263640" y="4041648"/>
+            <a:ext cx="5632704" cy="1901952"/>
           </a:xfrm>
           <a:prstGeom prst="roundRect">
             <a:avLst/>
@@ -9011,13 +8541,13 @@
               </a:spcAft>
             </a:pPr>
             <a:r>
-              <a:rPr sz="880" b="1" i="0">
+              <a:rPr sz="900" b="1" i="0">
                 <a:solidFill>
                   <a:srgbClr val="0F172A"/>
                 </a:solidFill>
                 <a:latin typeface="Arial"/>
               </a:rPr>
-              <a:t>• 1. Data Ingestion: </a:t>
+              <a:t>1. Ingestion: </a:t>
             </a:r>
             <a:r>
               <a:rPr sz="850" b="0" i="0">
@@ -9026,7 +8556,7 @@
                 </a:solidFill>
                 <a:latin typeface="Arial"/>
               </a:rPr>
-              <a:t>Bounding box clipping, UTM 44N reprojection, OSM vector extraction, Bhuvan cadastral validation.</a:t>
+              <a:t>Bounding box clipping, UTM reprojection, OSM vector extraction, Bhuvan validation.</a:t>
             </a:r>
           </a:p>
           <a:p>
@@ -9036,13 +8566,13 @@
               </a:spcAft>
             </a:pPr>
             <a:r>
-              <a:rPr sz="880" b="1" i="0">
+              <a:rPr sz="900" b="1" i="0">
                 <a:solidFill>
                   <a:srgbClr val="0F172A"/>
                 </a:solidFill>
                 <a:latin typeface="Arial"/>
               </a:rPr>
-              <a:t>• 2. Height Engine: </a:t>
+              <a:t>2. Height: </a:t>
             </a:r>
             <a:r>
               <a:rPr sz="850" b="0" i="0">
@@ -9051,7 +8581,7 @@
                 </a:solidFill>
                 <a:latin typeface="Arial"/>
               </a:rPr>
-              <a:t>DSM-DEM zonal diff + annular buffer terrain sampling + morphological typology + landmark registry.</a:t>
+              <a:t>DSM-DEM zonal diff + annular buffer terrain sampling + typology heuristics.</a:t>
             </a:r>
           </a:p>
           <a:p>
@@ -9061,13 +8591,13 @@
               </a:spcAft>
             </a:pPr>
             <a:r>
-              <a:rPr sz="880" b="1" i="0">
+              <a:rPr sz="900" b="1" i="0">
                 <a:solidFill>
                   <a:srgbClr val="0F172A"/>
                 </a:solidFill>
                 <a:latin typeface="Arial"/>
               </a:rPr>
-              <a:t>• 3. 3D Cadastre: </a:t>
+              <a:t>3. Cadastre: </a:t>
             </a:r>
             <a:r>
               <a:rPr sz="850" b="0" i="0">
@@ -9076,7 +8606,7 @@
                 </a:solidFill>
                 <a:latin typeface="Arial"/>
               </a:rPr>
-              <a:t>14-digit ULPIN, zero-discrepancy floor normalization (∑ hᵢ ≡ H), dual-tier volumetric parcels.</a:t>
+              <a:t>14-digit ULPIN, zero-discrepancy floor normalization, dual-tier volumetric parcels.</a:t>
             </a:r>
           </a:p>
           <a:p>
@@ -9086,13 +8616,13 @@
               </a:spcAft>
             </a:pPr>
             <a:r>
-              <a:rPr sz="880" b="1" i="0">
+              <a:rPr sz="900" b="1" i="0">
                 <a:solidFill>
                   <a:srgbClr val="0F172A"/>
                 </a:solidFill>
                 <a:latin typeface="Arial"/>
               </a:rPr>
-              <a:t>• 4. Digital Twin: </a:t>
+              <a:t>4. Digital Twin: </a:t>
             </a:r>
             <a:r>
               <a:rPr sz="850" b="0" i="0">
@@ -9101,51 +8631,8 @@
                 </a:solidFill>
                 <a:latin typeface="Arial"/>
               </a:rPr>
-              <a:t>Instanced rendering of 4,641 buildings + 238 km roads in 12.5s; interactive floor inspection.</a:t>
-            </a:r>
-          </a:p>
-        </p:txBody>
-      </p:sp>
-      <p:sp>
-        <p:nvSpPr>
-          <p:cNvPr id="17433" name="Rectangle 17432"/>
-          <p:cNvSpPr/>
-          <p:nvPr/>
-        </p:nvSpPr>
-        <p:spPr>
-          <a:xfrm>
-            <a:off x="6263640" y="4187952"/>
-            <a:ext cx="45720" cy="1755648"/>
-          </a:xfrm>
-          <a:prstGeom prst="rect">
-            <a:avLst/>
-          </a:prstGeom>
-          <a:solidFill>
-            <a:srgbClr val="10B981"/>
-          </a:solidFill>
-          <a:ln>
-            <a:noFill/>
-          </a:ln>
-        </p:spPr>
-        <p:style>
-          <a:lnRef idx="1">
-            <a:schemeClr val="accent1"/>
-          </a:lnRef>
-          <a:fillRef idx="3">
-            <a:schemeClr val="accent1"/>
-          </a:fillRef>
-          <a:effectRef idx="2">
-            <a:schemeClr val="accent1"/>
-          </a:effectRef>
-          <a:fontRef idx="minor">
-            <a:schemeClr val="lt1"/>
-          </a:fontRef>
-        </p:style>
-        <p:txBody>
-          <a:bodyPr rtlCol="0" anchor="ctr"/>
-          <a:lstStyle/>
-          <a:p>
-            <a:pPr algn="ctr"/>
+              <a:t>Instanced rendering of 4,641 buildings + 238 km roads; interactive inspection.</a:t>
+            </a:r>
           </a:p>
         </p:txBody>
       </p:sp>
@@ -9492,7 +8979,7 @@
           <a:p>
             <a:pPr algn="ctr"/>
             <a:r>
-              <a:rPr sz="1200" b="1">
+              <a:rPr sz="1200" b="1" i="0">
                 <a:solidFill>
                   <a:srgbClr val="FFFFFF"/>
                 </a:solidFill>
@@ -9505,7 +8992,7 @@
           <a:p>
             <a:pPr algn="ctr"/>
             <a:r>
-              <a:rPr sz="850" b="0">
+              <a:rPr sz="850" b="0" i="0">
                 <a:solidFill>
                   <a:srgbClr val="A5B4FC"/>
                 </a:solidFill>
@@ -9589,167 +9076,124 @@
           <a:p>
             <a:pPr algn="ctr">
               <a:spcAft>
+                <a:spcPts val="1000"/>
+              </a:spcAft>
+            </a:pPr>
+            <a:r>
+              <a:rPr sz="1250" b="1" i="0">
+                <a:solidFill>
+                  <a:srgbClr val="0284C7"/>
+                </a:solidFill>
+                <a:latin typeface="Arial"/>
+              </a:rPr>
+              <a:t>Feasibility Analysis</a:t>
+            </a:r>
+          </a:p>
+          <a:p>
+            <a:pPr>
+              <a:spcAft>
                 <a:spcPts val="800"/>
               </a:spcAft>
             </a:pPr>
             <a:r>
-              <a:rPr sz="1200" b="1" i="0">
+              <a:rPr sz="950" b="1" i="0">
                 <a:solidFill>
                   <a:srgbClr val="0284C7"/>
                 </a:solidFill>
                 <a:latin typeface="Arial"/>
               </a:rPr>
-              <a:t>✅ Analysis of Feasibility</a:t>
+              <a:t>Data: </a:t>
+            </a:r>
+            <a:r>
+              <a:rPr sz="900" b="0" i="0">
+                <a:solidFill>
+                  <a:srgbClr val="475569"/>
+                </a:solidFill>
+                <a:latin typeface="Arial"/>
+              </a:rPr>
+              <a:t>100% open sovereign data — Copernicus DEM, SRTM, ISRO Bhuvan, OSM. Zero licensing fees.</a:t>
             </a:r>
           </a:p>
           <a:p>
             <a:pPr>
               <a:spcAft>
-                <a:spcPts val="600"/>
+                <a:spcPts val="800"/>
               </a:spcAft>
             </a:pPr>
             <a:r>
-              <a:rPr sz="919" b="1" i="0">
+              <a:rPr sz="950" b="1" i="0">
                 <a:solidFill>
                   <a:srgbClr val="0284C7"/>
                 </a:solidFill>
                 <a:latin typeface="Arial"/>
               </a:rPr>
-              <a:t>• Data Feasibility: </a:t>
-            </a:r>
-            <a:r>
-              <a:rPr sz="850" b="0" i="0">
+              <a:t>Operations: </a:t>
+            </a:r>
+            <a:r>
+              <a:rPr sz="900" b="0" i="0">
                 <a:solidFill>
                   <a:srgbClr val="475569"/>
                 </a:solidFill>
                 <a:latin typeface="Arial"/>
               </a:rPr>
-              <a:t>100% open, authoritative sovereign data: Copernicus DEM, SRTM, ISRO Bhuvan, OSM, LGD codes. Zero recurring licensing fees.</a:t>
+              <a:t>Entire 9 km² urban sector processed in 12.5 seconds on commodity hardware.</a:t>
             </a:r>
           </a:p>
           <a:p>
             <a:pPr>
               <a:spcAft>
-                <a:spcPts val="600"/>
+                <a:spcPts val="800"/>
               </a:spcAft>
             </a:pPr>
             <a:r>
-              <a:rPr sz="919" b="1" i="0">
+              <a:rPr sz="950" b="1" i="0">
                 <a:solidFill>
                   <a:srgbClr val="0284C7"/>
                 </a:solidFill>
                 <a:latin typeface="Arial"/>
               </a:rPr>
-              <a:t>• Operational Feasibility: </a:t>
-            </a:r>
-            <a:r>
-              <a:rPr sz="850" b="0" i="0">
+              <a:t>Technical: </a:t>
+            </a:r>
+            <a:r>
+              <a:rPr sz="900" b="0" i="0">
                 <a:solidFill>
                   <a:srgbClr val="475569"/>
                 </a:solidFill>
                 <a:latin typeface="Arial"/>
               </a:rPr>
-              <a:t>Master pipeline processes 9 km² (4,641 buildings, 22,761 vertical parcels, 238 km roads) in 12.5 seconds on commodity hardware.</a:t>
+              <a:t>Built on ISO 19152 LADM, OGC CityGML, 14-digit DoLR ULPIN standards.</a:t>
             </a:r>
           </a:p>
           <a:p>
             <a:pPr>
               <a:spcAft>
-                <a:spcPts val="600"/>
+                <a:spcPts val="800"/>
               </a:spcAft>
             </a:pPr>
             <a:r>
-              <a:rPr sz="919" b="1" i="0">
+              <a:rPr sz="950" b="1" i="0">
                 <a:solidFill>
                   <a:srgbClr val="0284C7"/>
                 </a:solidFill>
                 <a:latin typeface="Arial"/>
               </a:rPr>
-              <a:t>• Technical Feasibility: </a:t>
-            </a:r>
-            <a:r>
-              <a:rPr sz="850" b="0" i="0">
+              <a:t>Deployment: </a:t>
+            </a:r>
+            <a:r>
+              <a:rPr sz="900" b="0" i="0">
                 <a:solidFill>
                   <a:srgbClr val="475569"/>
                 </a:solidFill>
                 <a:latin typeface="Arial"/>
               </a:rPr>
-              <a:t>Built on validated open standards: 14-digit DoLR ULPIN, ISO 19152 LADM, OGC CityGML, and GeoJSON-3D.</a:t>
-            </a:r>
-          </a:p>
-          <a:p>
-            <a:pPr>
-              <a:spcAft>
-                <a:spcPts val="600"/>
-              </a:spcAft>
-            </a:pPr>
-            <a:r>
-              <a:rPr sz="919" b="1" i="0">
-                <a:solidFill>
-                  <a:srgbClr val="0284C7"/>
-                </a:solidFill>
-                <a:latin typeface="Arial"/>
-              </a:rPr>
-              <a:t>• Deployment Viability: </a:t>
-            </a:r>
-            <a:r>
-              <a:rPr sz="850" b="0" i="0">
-                <a:solidFill>
-                  <a:srgbClr val="475569"/>
-                </a:solidFill>
-                <a:latin typeface="Arial"/>
-              </a:rPr>
-              <a:t>Client-side WebGL viewer runs at 60 FPS in standard desktop/mobile browsers — no GPUs or native installs required.</a:t>
-            </a:r>
-          </a:p>
-        </p:txBody>
-      </p:sp>
-      <p:sp>
-        <p:nvSpPr>
-          <p:cNvPr id="17411" name="Rectangle 17410"/>
-          <p:cNvSpPr/>
-          <p:nvPr/>
-        </p:nvSpPr>
-        <p:spPr>
-          <a:xfrm>
-            <a:off x="612648" y="1243584"/>
-            <a:ext cx="3392424" cy="36576"/>
-          </a:xfrm>
-          <a:prstGeom prst="rect">
-            <a:avLst/>
-          </a:prstGeom>
-          <a:solidFill>
-            <a:srgbClr val="0EA5E9"/>
-          </a:solidFill>
-          <a:ln>
-            <a:noFill/>
-          </a:ln>
-        </p:spPr>
-        <p:style>
-          <a:lnRef idx="1">
-            <a:schemeClr val="accent1"/>
-          </a:lnRef>
-          <a:fillRef idx="3">
-            <a:schemeClr val="accent1"/>
-          </a:fillRef>
-          <a:effectRef idx="2">
-            <a:schemeClr val="accent1"/>
-          </a:effectRef>
-          <a:fontRef idx="minor">
-            <a:schemeClr val="lt1"/>
-          </a:fontRef>
-        </p:style>
-        <p:txBody>
-          <a:bodyPr rtlCol="0" anchor="ctr"/>
-          <a:lstStyle/>
-          <a:p>
-            <a:pPr algn="ctr"/>
-          </a:p>
-        </p:txBody>
-      </p:sp>
-      <p:sp>
-        <p:nvSpPr>
-          <p:cNvPr id="17412" name="Rounded Rectangle 17411"/>
+              <a:t>Client-side WebGL at 60 FPS in any browser — no GPUs or native installs.</a:t>
+            </a:r>
+          </a:p>
+        </p:txBody>
+      </p:sp>
+      <p:sp>
+        <p:nvSpPr>
+          <p:cNvPr id="17411" name="Rounded Rectangle 17410"/>
           <p:cNvSpPr/>
           <p:nvPr/>
         </p:nvSpPr>
@@ -9790,167 +9234,124 @@
           <a:p>
             <a:pPr algn="ctr">
               <a:spcAft>
+                <a:spcPts val="1000"/>
+              </a:spcAft>
+            </a:pPr>
+            <a:r>
+              <a:rPr sz="1250" b="1" i="0">
+                <a:solidFill>
+                  <a:srgbClr val="E11D48"/>
+                </a:solidFill>
+                <a:latin typeface="Arial"/>
+              </a:rPr>
+              <a:t>Challenges &amp; Risks</a:t>
+            </a:r>
+          </a:p>
+          <a:p>
+            <a:pPr>
+              <a:spcAft>
                 <a:spcPts val="800"/>
               </a:spcAft>
             </a:pPr>
             <a:r>
-              <a:rPr sz="1200" b="1" i="0">
+              <a:rPr sz="950" b="1" i="0">
                 <a:solidFill>
                   <a:srgbClr val="E11D48"/>
                 </a:solidFill>
                 <a:latin typeface="Arial"/>
               </a:rPr>
-              <a:t>⚠️ Potential Challenges &amp; Risks</a:t>
+              <a:t>Raster Noise: </a:t>
+            </a:r>
+            <a:r>
+              <a:rPr sz="900" b="0" i="0">
+                <a:solidFill>
+                  <a:srgbClr val="475569"/>
+                </a:solidFill>
+                <a:latin typeface="Arial"/>
+              </a:rPr>
+              <a:t>30m DSM/DEM data has height distortion in dense high-rise clusters.</a:t>
             </a:r>
           </a:p>
           <a:p>
             <a:pPr>
               <a:spcAft>
-                <a:spcPts val="600"/>
+                <a:spcPts val="800"/>
               </a:spcAft>
             </a:pPr>
             <a:r>
-              <a:rPr sz="919" b="1" i="0">
-                <a:solidFill>
-                  <a:srgbClr val="F43F5E"/>
-                </a:solidFill>
-                <a:latin typeface="Arial"/>
-              </a:rPr>
-              <a:t>⚠ Satellite Raster Noise: </a:t>
-            </a:r>
-            <a:r>
-              <a:rPr sz="850" b="0" i="0">
+              <a:rPr sz="950" b="1" i="0">
+                <a:solidFill>
+                  <a:srgbClr val="E11D48"/>
+                </a:solidFill>
+                <a:latin typeface="Arial"/>
+              </a:rPr>
+              <a:t>Missing Plans: </a:t>
+            </a:r>
+            <a:r>
+              <a:rPr sz="900" b="0" i="0">
                 <a:solidFill>
                   <a:srgbClr val="475569"/>
                 </a:solidFill>
                 <a:latin typeface="Arial"/>
               </a:rPr>
-              <a:t>Global 30m DSM/DEM rasters exhibit height distortion and ground clutter in dense high-rise clusters.</a:t>
+              <a:t>95%+ of municipal buildings lack digitized floor plans for unit mapping.</a:t>
             </a:r>
           </a:p>
           <a:p>
             <a:pPr>
               <a:spcAft>
-                <a:spcPts val="600"/>
+                <a:spcPts val="800"/>
               </a:spcAft>
             </a:pPr>
             <a:r>
-              <a:rPr sz="919" b="1" i="0">
-                <a:solidFill>
-                  <a:srgbClr val="F43F5E"/>
-                </a:solidFill>
-                <a:latin typeface="Arial"/>
-              </a:rPr>
-              <a:t>⚠ Missing Floor Plans: </a:t>
-            </a:r>
-            <a:r>
-              <a:rPr sz="850" b="0" i="0">
+              <a:rPr sz="950" b="1" i="0">
+                <a:solidFill>
+                  <a:srgbClr val="E11D48"/>
+                </a:solidFill>
+                <a:latin typeface="Arial"/>
+              </a:rPr>
+              <a:t>Browser Limits: </a:t>
+            </a:r>
+            <a:r>
+              <a:rPr sz="900" b="0" i="0">
                 <a:solidFill>
                   <a:srgbClr val="475569"/>
                 </a:solidFill>
                 <a:latin typeface="Arial"/>
               </a:rPr>
-              <a:t>Over 95% of municipal multi-story buildings lack digitized CAD/BIM floor plans for unit-level mapping.</a:t>
+              <a:t>Simultaneous volumetric rendering can exhaust WebGL memory.</a:t>
             </a:r>
           </a:p>
           <a:p>
             <a:pPr>
               <a:spcAft>
-                <a:spcPts val="600"/>
+                <a:spcPts val="800"/>
               </a:spcAft>
             </a:pPr>
             <a:r>
-              <a:rPr sz="919" b="1" i="0">
-                <a:solidFill>
-                  <a:srgbClr val="F43F5E"/>
-                </a:solidFill>
-                <a:latin typeface="Arial"/>
-              </a:rPr>
-              <a:t>⚠ Browser Memory Limits: </a:t>
-            </a:r>
-            <a:r>
-              <a:rPr sz="850" b="0" i="0">
+              <a:rPr sz="950" b="1" i="0">
+                <a:solidFill>
+                  <a:srgbClr val="E11D48"/>
+                </a:solidFill>
+                <a:latin typeface="Arial"/>
+              </a:rPr>
+              <a:t>Elevation Drift: </a:t>
+            </a:r>
+            <a:r>
+              <a:rPr sz="900" b="0" i="0">
                 <a:solidFill>
                   <a:srgbClr val="475569"/>
                 </a:solidFill>
                 <a:latin typeface="Arial"/>
               </a:rPr>
-              <a:t>Rendering tens of thousands of volumetric property units simultaneously can exhaust WebGL resources.</a:t>
-            </a:r>
-          </a:p>
-          <a:p>
-            <a:pPr>
-              <a:spcAft>
-                <a:spcPts val="600"/>
-              </a:spcAft>
-            </a:pPr>
-            <a:r>
-              <a:rPr sz="919" b="1" i="0">
-                <a:solidFill>
-                  <a:srgbClr val="F43F5E"/>
-                </a:solidFill>
-                <a:latin typeface="Arial"/>
-              </a:rPr>
-              <a:t>⚠ Elevation Drift: </a:t>
-            </a:r>
-            <a:r>
-              <a:rPr sz="850" b="0" i="0">
-                <a:solidFill>
-                  <a:srgbClr val="475569"/>
-                </a:solidFill>
-                <a:latin typeface="Arial"/>
-              </a:rPr>
-              <a:t>Floor slab elevation rounding errors cause cumulative drift between computed slices and physical rooftops.</a:t>
-            </a:r>
-          </a:p>
-        </p:txBody>
-      </p:sp>
-      <p:sp>
-        <p:nvSpPr>
-          <p:cNvPr id="17413" name="Rectangle 17412"/>
-          <p:cNvSpPr/>
-          <p:nvPr/>
-        </p:nvSpPr>
-        <p:spPr>
-          <a:xfrm>
-            <a:off x="4389120" y="1243584"/>
-            <a:ext cx="3392424" cy="36576"/>
-          </a:xfrm>
-          <a:prstGeom prst="rect">
-            <a:avLst/>
-          </a:prstGeom>
-          <a:solidFill>
-            <a:srgbClr val="F43F5E"/>
-          </a:solidFill>
-          <a:ln>
-            <a:noFill/>
-          </a:ln>
-        </p:spPr>
-        <p:style>
-          <a:lnRef idx="1">
-            <a:schemeClr val="accent1"/>
-          </a:lnRef>
-          <a:fillRef idx="3">
-            <a:schemeClr val="accent1"/>
-          </a:fillRef>
-          <a:effectRef idx="2">
-            <a:schemeClr val="accent1"/>
-          </a:effectRef>
-          <a:fontRef idx="minor">
-            <a:schemeClr val="lt1"/>
-          </a:fontRef>
-        </p:style>
-        <p:txBody>
-          <a:bodyPr rtlCol="0" anchor="ctr"/>
-          <a:lstStyle/>
-          <a:p>
-            <a:pPr algn="ctr"/>
-          </a:p>
-        </p:txBody>
-      </p:sp>
-      <p:sp>
-        <p:nvSpPr>
-          <p:cNvPr id="17414" name="Rounded Rectangle 17413"/>
+              <a:t>Rounding errors cause cumulative drift between slices and rooftops.</a:t>
+            </a:r>
+          </a:p>
+        </p:txBody>
+      </p:sp>
+      <p:sp>
+        <p:nvSpPr>
+          <p:cNvPr id="17412" name="Rounded Rectangle 17411"/>
           <p:cNvSpPr/>
           <p:nvPr/>
         </p:nvSpPr>
@@ -9991,161 +9392,118 @@
           <a:p>
             <a:pPr algn="ctr">
               <a:spcAft>
+                <a:spcPts val="1000"/>
+              </a:spcAft>
+            </a:pPr>
+            <a:r>
+              <a:rPr sz="1250" b="1" i="0">
+                <a:solidFill>
+                  <a:srgbClr val="059669"/>
+                </a:solidFill>
+                <a:latin typeface="Arial"/>
+              </a:rPr>
+              <a:t>Mitigation Strategies</a:t>
+            </a:r>
+          </a:p>
+          <a:p>
+            <a:pPr>
+              <a:spcAft>
                 <a:spcPts val="800"/>
               </a:spcAft>
             </a:pPr>
             <a:r>
-              <a:rPr sz="1200" b="1" i="0">
+              <a:rPr sz="950" b="1" i="0">
                 <a:solidFill>
                   <a:srgbClr val="059669"/>
                 </a:solidFill>
                 <a:latin typeface="Arial"/>
               </a:rPr>
-              <a:t>🛡 Mitigation Strategies</a:t>
+              <a:t>5-Tier Fallback: </a:t>
+            </a:r>
+            <a:r>
+              <a:rPr sz="900" b="0" i="0">
+                <a:solidFill>
+                  <a:srgbClr val="475569"/>
+                </a:solidFill>
+                <a:latin typeface="Arial"/>
+              </a:rPr>
+              <a:t>Annular terrain buffering + morphological typology + landmark registries.</a:t>
             </a:r>
           </a:p>
           <a:p>
             <a:pPr>
               <a:spcAft>
-                <a:spcPts val="600"/>
+                <a:spcPts val="800"/>
               </a:spcAft>
             </a:pPr>
             <a:r>
-              <a:rPr sz="919" b="1" i="0">
-                <a:solidFill>
-                  <a:srgbClr val="10B981"/>
-                </a:solidFill>
-                <a:latin typeface="Arial"/>
-              </a:rPr>
-              <a:t>✓ 5-Tier Fallback Matrix: </a:t>
-            </a:r>
-            <a:r>
-              <a:rPr sz="850" b="0" i="0">
+              <a:rPr sz="950" b="1" i="0">
+                <a:solidFill>
+                  <a:srgbClr val="059669"/>
+                </a:solidFill>
+                <a:latin typeface="Arial"/>
+              </a:rPr>
+              <a:t>Dual-Mode: </a:t>
+            </a:r>
+            <a:r>
+              <a:rPr sz="900" b="0" i="0">
                 <a:solidFill>
                   <a:srgbClr val="475569"/>
                 </a:solidFill>
                 <a:latin typeface="Arial"/>
               </a:rPr>
-              <a:t>Combines annular terrain buffering, morphological typology rules, and crowd-verified landmark registries for robust accuracy.</a:t>
+              <a:t>Floor-level slicing as default; upgrades to unit-level when blueprints exist.</a:t>
             </a:r>
           </a:p>
           <a:p>
             <a:pPr>
               <a:spcAft>
-                <a:spcPts val="600"/>
+                <a:spcPts val="800"/>
               </a:spcAft>
             </a:pPr>
             <a:r>
-              <a:rPr sz="919" b="1" i="0">
-                <a:solidFill>
-                  <a:srgbClr val="10B981"/>
-                </a:solidFill>
-                <a:latin typeface="Arial"/>
-              </a:rPr>
-              <a:t>✓ Dual-Mode Architecture: </a:t>
-            </a:r>
-            <a:r>
-              <a:rPr sz="850" b="0" i="0">
+              <a:rPr sz="950" b="1" i="0">
+                <a:solidFill>
+                  <a:srgbClr val="059669"/>
+                </a:solidFill>
+                <a:latin typeface="Arial"/>
+              </a:rPr>
+              <a:t>On-Demand LOD: </a:t>
+            </a:r>
+            <a:r>
+              <a:rPr sz="900" b="0" i="0">
                 <a:solidFill>
                   <a:srgbClr val="475569"/>
                 </a:solidFill>
                 <a:latin typeface="Arial"/>
               </a:rPr>
-              <a:t>Automated floor-level vertical partitioning (-FLxx) as standard, seamlessly upgrading to unit-level (-FLxx-Uyyyy) when blueprints exist.</a:t>
+              <a:t>Only selected building is volumetrically extruded; others stay as batched mesh.</a:t>
             </a:r>
           </a:p>
           <a:p>
             <a:pPr>
               <a:spcAft>
-                <a:spcPts val="600"/>
+                <a:spcPts val="800"/>
               </a:spcAft>
             </a:pPr>
             <a:r>
-              <a:rPr sz="919" b="1" i="0">
-                <a:solidFill>
-                  <a:srgbClr val="10B981"/>
-                </a:solidFill>
-                <a:latin typeface="Arial"/>
-              </a:rPr>
-              <a:t>✓ On-Demand Volumetric LOD: </a:t>
-            </a:r>
-            <a:r>
-              <a:rPr sz="850" b="0" i="0">
+              <a:rPr sz="950" b="1" i="0">
+                <a:solidFill>
+                  <a:srgbClr val="059669"/>
+                </a:solidFill>
+                <a:latin typeface="Arial"/>
+              </a:rPr>
+              <a:t>Normalizer: </a:t>
+            </a:r>
+            <a:r>
+              <a:rPr sz="900" b="0" i="0">
                 <a:solidFill>
                   <a:srgbClr val="475569"/>
                 </a:solidFill>
                 <a:latin typeface="Arial"/>
               </a:rPr>
-              <a:t>Only the selected building is dynamically extruded into volumetric floor slices; others remain optimized batched meshes at 60 FPS.</a:t>
-            </a:r>
-          </a:p>
-          <a:p>
-            <a:pPr>
-              <a:spcAft>
-                <a:spcPts val="600"/>
-              </a:spcAft>
-            </a:pPr>
-            <a:r>
-              <a:rPr sz="919" b="1" i="0">
-                <a:solidFill>
-                  <a:srgbClr val="10B981"/>
-                </a:solidFill>
-                <a:latin typeface="Arial"/>
-              </a:rPr>
-              <a:t>✓ Proportional Normalizer: </a:t>
-            </a:r>
-            <a:r>
-              <a:rPr sz="850" b="0" i="0">
-                <a:solidFill>
-                  <a:srgbClr val="475569"/>
-                </a:solidFill>
-                <a:latin typeface="Arial"/>
-              </a:rPr>
-              <a:t>Strictly enforces ∑ hᵢ ≡ H_building and snaps top floor ceiling to base + total_height with 0.00m error.</a:t>
-            </a:r>
-          </a:p>
-        </p:txBody>
-      </p:sp>
-      <p:sp>
-        <p:nvSpPr>
-          <p:cNvPr id="17415" name="Rectangle 17414"/>
-          <p:cNvSpPr/>
-          <p:nvPr/>
-        </p:nvSpPr>
-        <p:spPr>
-          <a:xfrm>
-            <a:off x="8165592" y="1243584"/>
-            <a:ext cx="3392424" cy="36576"/>
-          </a:xfrm>
-          <a:prstGeom prst="rect">
-            <a:avLst/>
-          </a:prstGeom>
-          <a:solidFill>
-            <a:srgbClr val="10B981"/>
-          </a:solidFill>
-          <a:ln>
-            <a:noFill/>
-          </a:ln>
-        </p:spPr>
-        <p:style>
-          <a:lnRef idx="1">
-            <a:schemeClr val="accent1"/>
-          </a:lnRef>
-          <a:fillRef idx="3">
-            <a:schemeClr val="accent1"/>
-          </a:fillRef>
-          <a:effectRef idx="2">
-            <a:schemeClr val="accent1"/>
-          </a:effectRef>
-          <a:fontRef idx="minor">
-            <a:schemeClr val="lt1"/>
-          </a:fontRef>
-        </p:style>
-        <p:txBody>
-          <a:bodyPr rtlCol="0" anchor="ctr"/>
-          <a:lstStyle/>
-          <a:p>
-            <a:pPr algn="ctr"/>
+              <a:t>Enforces cumulative height = building height with 0.00m error tolerance.</a:t>
+            </a:r>
           </a:p>
         </p:txBody>
       </p:sp>
@@ -10497,7 +9855,7 @@
           <a:p>
             <a:pPr algn="ctr"/>
             <a:r>
-              <a:rPr sz="1200" b="1">
+              <a:rPr sz="1200" b="1" i="0">
                 <a:solidFill>
                   <a:srgbClr val="FFFFFF"/>
                 </a:solidFill>
@@ -10510,7 +9868,7 @@
           <a:p>
             <a:pPr algn="ctr"/>
             <a:r>
-              <a:rPr sz="850" b="0">
+              <a:rPr sz="850" b="0" i="0">
                 <a:solidFill>
                   <a:srgbClr val="A5B4FC"/>
                 </a:solidFill>
@@ -10594,23 +9952,23 @@
           <a:p>
             <a:pPr algn="ctr">
               <a:spcAft>
-                <a:spcPts val="600"/>
+                <a:spcPts val="800"/>
               </a:spcAft>
             </a:pPr>
             <a:r>
-              <a:rPr sz="1200" b="1" i="0">
+              <a:rPr sz="1250" b="1" i="0">
                 <a:solidFill>
                   <a:srgbClr val="0284C7"/>
                 </a:solidFill>
                 <a:latin typeface="Arial"/>
               </a:rPr>
-              <a:t>🎯 Potential Impact on Target Audience</a:t>
+              <a:t>Potential Impact on Target Audience</a:t>
             </a:r>
           </a:p>
           <a:p>
             <a:pPr>
               <a:spcAft>
-                <a:spcPts val="600"/>
+                <a:spcPts val="800"/>
               </a:spcAft>
             </a:pPr>
             <a:r>
@@ -10620,49 +9978,29 @@
                 </a:solidFill>
                 <a:latin typeface="Arial"/>
               </a:rPr>
-              <a:t>• Dept. of Land Resources (DoLR) &amp; Survey of India:
-</a:t>
-            </a:r>
-            <a:r>
-              <a:rPr sz="880" b="0" i="0">
-                <a:solidFill>
-                  <a:srgbClr val="475569"/>
-                </a:solidFill>
-                <a:latin typeface="Arial"/>
-              </a:rPr>
-              <a:t>  Production-ready blueprint to transition 2D Bhu-Aadhaar into a national 3D cadastral framework, ending airspace boundary overlaps.</a:t>
+              <a:t>Dept. of Land Resources &amp; Survey of India</a:t>
             </a:r>
           </a:p>
           <a:p>
             <a:pPr>
               <a:spcAft>
-                <a:spcPts val="600"/>
+                <a:spcPts val="400"/>
               </a:spcAft>
             </a:pPr>
             <a:r>
-              <a:rPr sz="950" b="1" i="0">
-                <a:solidFill>
-                  <a:srgbClr val="0F172A"/>
-                </a:solidFill>
-                <a:latin typeface="Arial"/>
-              </a:rPr>
-              <a:t>• Urban Local Bodies (GHMC / Smart City SPVs):
-</a:t>
-            </a:r>
-            <a:r>
-              <a:rPr sz="880" b="0" i="0">
+              <a:rPr sz="900" b="0" i="0">
                 <a:solidFill>
                   <a:srgbClr val="475569"/>
                 </a:solidFill>
                 <a:latin typeface="Arial"/>
               </a:rPr>
-              <a:t>  Unlocks 15–25% higher property tax collection by detecting unassessed floors, unauthorized penthouses, and FAR/FSI violations.</a:t>
+              <a:t>Blueprint to transition 2D Bhu-Aadhaar into a national 3D cadastral framework.</a:t>
             </a:r>
           </a:p>
           <a:p>
             <a:pPr>
               <a:spcAft>
-                <a:spcPts val="600"/>
+                <a:spcPts val="800"/>
               </a:spcAft>
             </a:pPr>
             <a:r>
@@ -10672,93 +10010,94 @@
                 </a:solidFill>
                 <a:latin typeface="Arial"/>
               </a:rPr>
-              <a:t>• Homebuyers, Citizens &amp; RWA Associations:
-</a:t>
-            </a:r>
-            <a:r>
-              <a:rPr sz="880" b="0" i="0">
-                <a:solidFill>
-                  <a:srgbClr val="475569"/>
-                </a:solidFill>
-                <a:latin typeface="Arial"/>
-              </a:rPr>
-              <a:t>  Grants undisputed legal title to specific vertical airspace parcels, replacing fragile Undivided Share of Land (UDS) agreements.</a:t>
+              <a:t>Urban Local Bodies (GHMC / Smart City)</a:t>
             </a:r>
           </a:p>
           <a:p>
             <a:pPr>
               <a:spcAft>
-                <a:spcPts val="600"/>
+                <a:spcPts val="400"/>
               </a:spcAft>
             </a:pPr>
             <a:r>
+              <a:rPr sz="900" b="0" i="0">
+                <a:solidFill>
+                  <a:srgbClr val="475569"/>
+                </a:solidFill>
+                <a:latin typeface="Arial"/>
+              </a:rPr>
+              <a:t>15–25% higher property tax via detection of unassessed floors and FAR violations.</a:t>
+            </a:r>
+          </a:p>
+          <a:p>
+            <a:pPr>
+              <a:spcAft>
+                <a:spcPts val="800"/>
+              </a:spcAft>
+            </a:pPr>
+            <a:r>
               <a:rPr sz="950" b="1" i="0">
                 <a:solidFill>
                   <a:srgbClr val="0F172A"/>
                 </a:solidFill>
                 <a:latin typeface="Arial"/>
               </a:rPr>
-              <a:t>• Banks, NBFCs &amp; Mortgage Lenders:
-</a:t>
-            </a:r>
-            <a:r>
-              <a:rPr sz="880" b="0" i="0">
+              <a:t>Homebuyers &amp; Citizens</a:t>
+            </a:r>
+          </a:p>
+          <a:p>
+            <a:pPr>
+              <a:spcAft>
+                <a:spcPts val="400"/>
+              </a:spcAft>
+            </a:pPr>
+            <a:r>
+              <a:rPr sz="900" b="0" i="0">
                 <a:solidFill>
                   <a:srgbClr val="475569"/>
                 </a:solidFill>
                 <a:latin typeface="Arial"/>
               </a:rPr>
-              <a:t>  Instant 3D geospatial collateral verification; completely eliminates fraudulent multi-mortgaging of the same apartment flat.</a:t>
-            </a:r>
-          </a:p>
-        </p:txBody>
-      </p:sp>
-      <p:sp>
-        <p:nvSpPr>
-          <p:cNvPr id="17411" name="Rectangle 17410"/>
-          <p:cNvSpPr/>
-          <p:nvPr/>
-        </p:nvSpPr>
-        <p:spPr>
-          <a:xfrm>
-            <a:off x="502920" y="1188720"/>
-            <a:ext cx="45720" cy="4754880"/>
-          </a:xfrm>
-          <a:prstGeom prst="rect">
-            <a:avLst/>
-          </a:prstGeom>
-          <a:solidFill>
-            <a:srgbClr val="0EA5E9"/>
-          </a:solidFill>
-          <a:ln>
-            <a:noFill/>
-          </a:ln>
-        </p:spPr>
-        <p:style>
-          <a:lnRef idx="1">
-            <a:schemeClr val="accent1"/>
-          </a:lnRef>
-          <a:fillRef idx="3">
-            <a:schemeClr val="accent1"/>
-          </a:fillRef>
-          <a:effectRef idx="2">
-            <a:schemeClr val="accent1"/>
-          </a:effectRef>
-          <a:fontRef idx="minor">
-            <a:schemeClr val="lt1"/>
-          </a:fontRef>
-        </p:style>
-        <p:txBody>
-          <a:bodyPr rtlCol="0" anchor="ctr"/>
-          <a:lstStyle/>
-          <a:p>
-            <a:pPr algn="ctr"/>
-          </a:p>
-        </p:txBody>
-      </p:sp>
-      <p:sp>
-        <p:nvSpPr>
-          <p:cNvPr id="17412" name="Rounded Rectangle 17411"/>
+              <a:t>Undisputed legal title to specific vertical airspace, replacing UDS agreements.</a:t>
+            </a:r>
+          </a:p>
+          <a:p>
+            <a:pPr>
+              <a:spcAft>
+                <a:spcPts val="800"/>
+              </a:spcAft>
+            </a:pPr>
+            <a:r>
+              <a:rPr sz="950" b="1" i="0">
+                <a:solidFill>
+                  <a:srgbClr val="0F172A"/>
+                </a:solidFill>
+                <a:latin typeface="Arial"/>
+              </a:rPr>
+              <a:t>Banks &amp; Mortgage Lenders</a:t>
+            </a:r>
+          </a:p>
+          <a:p>
+            <a:pPr>
+              <a:spcAft>
+                <a:spcPts val="400"/>
+              </a:spcAft>
+            </a:pPr>
+            <a:r>
+              <a:rPr sz="900" b="0" i="0">
+                <a:solidFill>
+                  <a:srgbClr val="475569"/>
+                </a:solidFill>
+                <a:latin typeface="Arial"/>
+              </a:rPr>
+              <a:t>Instant 3D collateral verification; eliminates fraudulent multi-mortgaging.</a:t>
+            </a:r>
+          </a:p>
+        </p:txBody>
+      </p:sp>
+      <p:sp>
+        <p:nvSpPr>
+          <p:cNvPr id="17411" name="Rounded Rectangle 17410"/>
           <p:cNvSpPr/>
           <p:nvPr/>
         </p:nvSpPr>
@@ -10799,23 +10138,23 @@
           <a:p>
             <a:pPr algn="ctr">
               <a:spcAft>
-                <a:spcPts val="600"/>
+                <a:spcPts val="800"/>
               </a:spcAft>
             </a:pPr>
             <a:r>
-              <a:rPr sz="1200" b="1" i="0">
+              <a:rPr sz="1250" b="1" i="0">
                 <a:solidFill>
                   <a:srgbClr val="059669"/>
                 </a:solidFill>
                 <a:latin typeface="Arial"/>
               </a:rPr>
-              <a:t>★ Benefits (Social, Economic, Environmental)</a:t>
+              <a:t>Benefits (Social, Economic, Environmental)</a:t>
             </a:r>
           </a:p>
           <a:p>
             <a:pPr>
               <a:spcAft>
-                <a:spcPts val="600"/>
+                <a:spcPts val="800"/>
               </a:spcAft>
             </a:pPr>
             <a:r>
@@ -10825,49 +10164,29 @@
                 </a:solidFill>
                 <a:latin typeface="Arial"/>
               </a:rPr>
-              <a:t>💰 Economic Benefits:
-</a:t>
-            </a:r>
-            <a:r>
-              <a:rPr sz="880" b="0" i="0">
-                <a:solidFill>
-                  <a:srgbClr val="475569"/>
-                </a:solidFill>
-                <a:latin typeface="Arial"/>
-              </a:rPr>
-              <a:t>  Eliminates billions of rupees in civil land litigation; accelerates bank loan approvals from weeks to minutes; enables transparent, view-based property valuations.</a:t>
+              <a:t>Economic</a:t>
             </a:r>
           </a:p>
           <a:p>
             <a:pPr>
               <a:spcAft>
-                <a:spcPts val="600"/>
+                <a:spcPts val="400"/>
               </a:spcAft>
             </a:pPr>
             <a:r>
-              <a:rPr sz="950" b="1" i="0">
-                <a:solidFill>
-                  <a:srgbClr val="10B981"/>
-                </a:solidFill>
-                <a:latin typeface="Arial"/>
-              </a:rPr>
-              <a:t>🏛 Social &amp; Governance:
-</a:t>
-            </a:r>
-            <a:r>
-              <a:rPr sz="880" b="0" i="0">
+              <a:rPr sz="900" b="0" i="0">
                 <a:solidFill>
                   <a:srgbClr val="475569"/>
                 </a:solidFill>
                 <a:latin typeface="Arial"/>
               </a:rPr>
-              <a:t>  100% transparency in vertical real estate ownership; prevents double-selling scams; empowers citizens with direct verification of sanctioned boundaries.</a:t>
+              <a:t>Eliminates land litigation costs; accelerates bank loan approvals from weeks to minutes.</a:t>
             </a:r>
           </a:p>
           <a:p>
             <a:pPr>
               <a:spcAft>
-                <a:spcPts val="600"/>
+                <a:spcPts val="800"/>
               </a:spcAft>
             </a:pPr>
             <a:r>
@@ -10877,87 +10196,88 @@
                 </a:solidFill>
                 <a:latin typeface="Arial"/>
               </a:rPr>
-              <a:t>🚨 Disaster Management &amp; Safety:
-</a:t>
-            </a:r>
-            <a:r>
-              <a:rPr sz="880" b="0" i="0">
-                <a:solidFill>
-                  <a:srgbClr val="475569"/>
-                </a:solidFill>
-                <a:latin typeface="Arial"/>
-              </a:rPr>
-              <a:t>  Floor-level flood inundation simulation (e.g. Durgam Cheruvu lake breach modeling) identifies submerged levels in real time for precision rescue operations.</a:t>
+              <a:t>Social &amp; Governance</a:t>
             </a:r>
           </a:p>
           <a:p>
             <a:pPr>
               <a:spcAft>
-                <a:spcPts val="600"/>
+                <a:spcPts val="400"/>
               </a:spcAft>
             </a:pPr>
             <a:r>
+              <a:rPr sz="900" b="0" i="0">
+                <a:solidFill>
+                  <a:srgbClr val="475569"/>
+                </a:solidFill>
+                <a:latin typeface="Arial"/>
+              </a:rPr>
+              <a:t>100% transparency in vertical ownership; prevents double-selling scams.</a:t>
+            </a:r>
+          </a:p>
+          <a:p>
+            <a:pPr>
+              <a:spcAft>
+                <a:spcPts val="800"/>
+              </a:spcAft>
+            </a:pPr>
+            <a:r>
               <a:rPr sz="950" b="1" i="0">
                 <a:solidFill>
                   <a:srgbClr val="10B981"/>
                 </a:solidFill>
                 <a:latin typeface="Arial"/>
               </a:rPr>
-              <a:t>🌿 Environmental &amp; Urban Planning:
-</a:t>
-            </a:r>
-            <a:r>
-              <a:rPr sz="880" b="0" i="0">
+              <a:t>Disaster Management</a:t>
+            </a:r>
+          </a:p>
+          <a:p>
+            <a:pPr>
+              <a:spcAft>
+                <a:spcPts val="400"/>
+              </a:spcAft>
+            </a:pPr>
+            <a:r>
+              <a:rPr sz="900" b="0" i="0">
                 <a:solidFill>
                   <a:srgbClr val="475569"/>
                 </a:solidFill>
                 <a:latin typeface="Arial"/>
               </a:rPr>
-              <a:t>  3D solar shadow path analysis enables accurate rooftop solar PV capacity estimation and micro-climate urban heat island mitigation strategies.</a:t>
-            </a:r>
-          </a:p>
-        </p:txBody>
-      </p:sp>
-      <p:sp>
-        <p:nvSpPr>
-          <p:cNvPr id="17413" name="Rectangle 17412"/>
-          <p:cNvSpPr/>
-          <p:nvPr/>
-        </p:nvSpPr>
-        <p:spPr>
-          <a:xfrm>
-            <a:off x="6263640" y="1188720"/>
-            <a:ext cx="45720" cy="4754880"/>
-          </a:xfrm>
-          <a:prstGeom prst="rect">
-            <a:avLst/>
-          </a:prstGeom>
-          <a:solidFill>
-            <a:srgbClr val="10B981"/>
-          </a:solidFill>
-          <a:ln>
-            <a:noFill/>
-          </a:ln>
-        </p:spPr>
-        <p:style>
-          <a:lnRef idx="1">
-            <a:schemeClr val="accent1"/>
-          </a:lnRef>
-          <a:fillRef idx="3">
-            <a:schemeClr val="accent1"/>
-          </a:fillRef>
-          <a:effectRef idx="2">
-            <a:schemeClr val="accent1"/>
-          </a:effectRef>
-          <a:fontRef idx="minor">
-            <a:schemeClr val="lt1"/>
-          </a:fontRef>
-        </p:style>
-        <p:txBody>
-          <a:bodyPr rtlCol="0" anchor="ctr"/>
-          <a:lstStyle/>
-          <a:p>
-            <a:pPr algn="ctr"/>
+              <a:t>Floor-level flood simulation identifies submerged levels for precision rescue.</a:t>
+            </a:r>
+          </a:p>
+          <a:p>
+            <a:pPr>
+              <a:spcAft>
+                <a:spcPts val="800"/>
+              </a:spcAft>
+            </a:pPr>
+            <a:r>
+              <a:rPr sz="950" b="1" i="0">
+                <a:solidFill>
+                  <a:srgbClr val="10B981"/>
+                </a:solidFill>
+                <a:latin typeface="Arial"/>
+              </a:rPr>
+              <a:t>Environmental</a:t>
+            </a:r>
+          </a:p>
+          <a:p>
+            <a:pPr>
+              <a:spcAft>
+                <a:spcPts val="400"/>
+              </a:spcAft>
+            </a:pPr>
+            <a:r>
+              <a:rPr sz="900" b="0" i="0">
+                <a:solidFill>
+                  <a:srgbClr val="475569"/>
+                </a:solidFill>
+                <a:latin typeface="Arial"/>
+              </a:rPr>
+              <a:t>3D solar shadow analysis enables rooftop PV capacity estimation and heat island mitigation.</a:t>
+            </a:r>
           </a:p>
         </p:txBody>
       </p:sp>
@@ -11309,7 +10629,7 @@
           <a:p>
             <a:pPr algn="ctr"/>
             <a:r>
-              <a:rPr sz="1200" b="1">
+              <a:rPr sz="1200" b="1" i="0">
                 <a:solidFill>
                   <a:srgbClr val="FFFFFF"/>
                 </a:solidFill>
@@ -11322,7 +10642,7 @@
           <a:p>
             <a:pPr algn="ctr"/>
             <a:r>
-              <a:rPr sz="850" b="0">
+              <a:rPr sz="850" b="0" i="0">
                 <a:solidFill>
                   <a:srgbClr val="A5B4FC"/>
                 </a:solidFill>
@@ -11406,224 +10726,181 @@
           <a:p>
             <a:pPr algn="ctr">
               <a:spcAft>
+                <a:spcPts val="600"/>
+              </a:spcAft>
+            </a:pPr>
+            <a:r>
+              <a:rPr sz="1250" b="1" i="0">
+                <a:solidFill>
+                  <a:srgbClr val="0284C7"/>
+                </a:solidFill>
+                <a:latin typeface="Arial"/>
+              </a:rPr>
+              <a:t>Research &amp; Reference Work</a:t>
+            </a:r>
+          </a:p>
+          <a:p>
+            <a:pPr>
+              <a:spcAft>
                 <a:spcPts val="500"/>
               </a:spcAft>
             </a:pPr>
             <a:r>
-              <a:rPr sz="1200" b="1" i="0">
-                <a:solidFill>
-                  <a:srgbClr val="0284C7"/>
-                </a:solidFill>
-                <a:latin typeface="Arial"/>
-              </a:rPr>
-              <a:t>📚 Research &amp; Reference Work</a:t>
+              <a:rPr sz="900" b="1" i="0">
+                <a:solidFill>
+                  <a:srgbClr val="0F172A"/>
+                </a:solidFill>
+                <a:latin typeface="Arial"/>
+              </a:rPr>
+              <a:t>DoLR / NIC Guidelines: </a:t>
+            </a:r>
+            <a:r>
+              <a:rPr sz="850" b="0" i="0">
+                <a:solidFill>
+                  <a:srgbClr val="475569"/>
+                </a:solidFill>
+                <a:latin typeface="Arial"/>
+              </a:rPr>
+              <a:t>ULPIN / Bhu-Aadhaar Technical Specifications &amp; Design Guidelines (2021–2024).</a:t>
             </a:r>
           </a:p>
           <a:p>
             <a:pPr>
               <a:spcAft>
-                <a:spcPts val="400"/>
+                <a:spcPts val="500"/>
               </a:spcAft>
             </a:pPr>
             <a:r>
-              <a:rPr sz="880" b="1" i="0">
+              <a:rPr sz="900" b="1" i="0">
                 <a:solidFill>
                   <a:srgbClr val="0F172A"/>
                 </a:solidFill>
                 <a:latin typeface="Arial"/>
               </a:rPr>
-              <a:t>• DoLR / NIC Technical Guidelines: </a:t>
-            </a:r>
-            <a:r>
-              <a:rPr sz="819" b="0" i="0">
+              <a:t>ISO 19152 (LADM): </a:t>
+            </a:r>
+            <a:r>
+              <a:rPr sz="850" b="0" i="0">
                 <a:solidFill>
                   <a:srgbClr val="475569"/>
                 </a:solidFill>
                 <a:latin typeface="Arial"/>
               </a:rPr>
-              <a:t>Dept. of Land Resources, MoRD, GoI: ULPIN / Bhu-Aadhaar Technical Specifications &amp; Design Guidelines (2021–2024).</a:t>
+              <a:t>Land Administration Domain Model — Part 3: 3D/4D Spatial Administration.</a:t>
             </a:r>
           </a:p>
           <a:p>
             <a:pPr>
               <a:spcAft>
-                <a:spcPts val="400"/>
+                <a:spcPts val="500"/>
               </a:spcAft>
             </a:pPr>
             <a:r>
-              <a:rPr sz="880" b="1" i="0">
+              <a:rPr sz="900" b="1" i="0">
                 <a:solidFill>
                   <a:srgbClr val="0F172A"/>
                 </a:solidFill>
                 <a:latin typeface="Arial"/>
               </a:rPr>
-              <a:t>• ISO 19152:2012 / 2024 (LADM): </a:t>
-            </a:r>
-            <a:r>
-              <a:rPr sz="819" b="0" i="0">
+              <a:t>OGC Standards: </a:t>
+            </a:r>
+            <a:r>
+              <a:rPr sz="850" b="0" i="0">
                 <a:solidFill>
                   <a:srgbClr val="475569"/>
                 </a:solidFill>
                 <a:latin typeface="Arial"/>
               </a:rPr>
-              <a:t>Geographic Information — Land Administration Domain Model (LADM) — Part 3: 3D/4D Marine and Space Administration.</a:t>
+              <a:t>CityGML 3.0 &amp; 3D Tiles Community Standard for streaming geospatial models.</a:t>
             </a:r>
           </a:p>
           <a:p>
             <a:pPr>
               <a:spcAft>
-                <a:spcPts val="400"/>
+                <a:spcPts val="500"/>
               </a:spcAft>
             </a:pPr>
             <a:r>
-              <a:rPr sz="880" b="1" i="0">
+              <a:rPr sz="900" b="1" i="0">
                 <a:solidFill>
                   <a:srgbClr val="0F172A"/>
                 </a:solidFill>
                 <a:latin typeface="Arial"/>
               </a:rPr>
-              <a:t>• OGC Geospatial Standards: </a:t>
-            </a:r>
-            <a:r>
-              <a:rPr sz="819" b="0" i="0">
+              <a:t>Survey of India &amp; MoHUA: </a:t>
+            </a:r>
+            <a:r>
+              <a:rPr sz="850" b="0" i="0">
                 <a:solidFill>
                   <a:srgbClr val="475569"/>
                 </a:solidFill>
                 <a:latin typeface="Arial"/>
               </a:rPr>
-              <a:t>City Geography Markup Language (CityGML 3.0) &amp; 3D Tiles Community Standard for streaming massive geospatial models.</a:t>
+              <a:t>National Geospatial Policy 2022 &amp; NUDM Smart City guidelines.</a:t>
             </a:r>
           </a:p>
           <a:p>
             <a:pPr>
               <a:spcAft>
-                <a:spcPts val="400"/>
+                <a:spcPts val="500"/>
               </a:spcAft>
             </a:pPr>
             <a:r>
-              <a:rPr sz="880" b="1" i="0">
+              <a:rPr sz="900" b="1" i="0">
                 <a:solidFill>
                   <a:srgbClr val="0F172A"/>
                 </a:solidFill>
                 <a:latin typeface="Arial"/>
               </a:rPr>
-              <a:t>• Survey of India &amp; MoHUA: </a:t>
-            </a:r>
-            <a:r>
-              <a:rPr sz="819" b="0" i="0">
+              <a:t>Academic Research: </a:t>
+            </a:r>
+            <a:r>
+              <a:rPr sz="850" b="0" i="0">
                 <a:solidFill>
                   <a:srgbClr val="475569"/>
                 </a:solidFill>
                 <a:latin typeface="Arial"/>
               </a:rPr>
-              <a:t>National Geospatial Policy 2022 &amp; National Urban Digital Mission (NUDM) Smart City guidelines.</a:t>
+              <a:t>Biljecki et al. (2015): 3D City Models; Stoter et al. (2020): 3D Cadastre in Practice.</a:t>
             </a:r>
           </a:p>
           <a:p>
             <a:pPr>
               <a:spcAft>
-                <a:spcPts val="400"/>
+                <a:spcPts val="500"/>
               </a:spcAft>
             </a:pPr>
             <a:r>
-              <a:rPr sz="880" b="1" i="0">
+              <a:rPr sz="900" b="1" i="0">
                 <a:solidFill>
                   <a:srgbClr val="0F172A"/>
                 </a:solidFill>
                 <a:latin typeface="Arial"/>
               </a:rPr>
-              <a:t>• Academic Research: </a:t>
-            </a:r>
-            <a:r>
-              <a:rPr sz="819" b="0" i="0">
+              <a:t>Data Sources: </a:t>
+            </a:r>
+            <a:r>
+              <a:rPr sz="850" b="0" i="0">
                 <a:solidFill>
                   <a:srgbClr val="475569"/>
                 </a:solidFill>
                 <a:latin typeface="Arial"/>
               </a:rPr>
-              <a:t>Biljecki et al. (2015): 'Applications of 3D City Models' (ISPRS IJGI); Stoter et al. (2020): '3D Cadastre in Practice'.</a:t>
-            </a:r>
-          </a:p>
-          <a:p>
-            <a:pPr>
-              <a:spcAft>
-                <a:spcPts val="400"/>
-              </a:spcAft>
-            </a:pPr>
-            <a:r>
-              <a:rPr sz="880" b="1" i="0">
-                <a:solidFill>
-                  <a:srgbClr val="0F172A"/>
-                </a:solidFill>
-                <a:latin typeface="Arial"/>
-              </a:rPr>
-              <a:t>• Authoritative Data Provenance: </a:t>
-            </a:r>
-            <a:r>
-              <a:rPr sz="819" b="0" i="0">
-                <a:solidFill>
-                  <a:srgbClr val="475569"/>
-                </a:solidFill>
-                <a:latin typeface="Arial"/>
-              </a:rPr>
-              <a:t>Copernicus GLO-30 DSM (AWS), SRTM GL1 DEM (OpenTopography), ISRO Bhuvan OGC Geoportal, OSM (ODbL), TS-RERA Portal.</a:t>
-            </a:r>
-          </a:p>
-        </p:txBody>
-      </p:sp>
-      <p:sp>
-        <p:nvSpPr>
-          <p:cNvPr id="17411" name="Rectangle 17410"/>
-          <p:cNvSpPr/>
-          <p:nvPr/>
-        </p:nvSpPr>
-        <p:spPr>
-          <a:xfrm>
-            <a:off x="502920" y="1188720"/>
-            <a:ext cx="45720" cy="4754880"/>
-          </a:xfrm>
-          <a:prstGeom prst="rect">
-            <a:avLst/>
-          </a:prstGeom>
-          <a:solidFill>
-            <a:srgbClr val="0EA5E9"/>
-          </a:solidFill>
-          <a:ln>
-            <a:noFill/>
-          </a:ln>
-        </p:spPr>
-        <p:style>
-          <a:lnRef idx="1">
-            <a:schemeClr val="accent1"/>
-          </a:lnRef>
-          <a:fillRef idx="3">
-            <a:schemeClr val="accent1"/>
-          </a:fillRef>
-          <a:effectRef idx="2">
-            <a:schemeClr val="accent1"/>
-          </a:effectRef>
-          <a:fontRef idx="minor">
-            <a:schemeClr val="lt1"/>
-          </a:fontRef>
-        </p:style>
-        <p:txBody>
-          <a:bodyPr rtlCol="0" anchor="ctr"/>
-          <a:lstStyle/>
-          <a:p>
-            <a:pPr algn="ctr"/>
-          </a:p>
-        </p:txBody>
-      </p:sp>
-      <p:sp>
-        <p:nvSpPr>
-          <p:cNvPr id="17412" name="Rounded Rectangle 17411"/>
+              <a:t>Copernicus GLO-30 DSM, SRTM DEM, ISRO Bhuvan, OSM (ODbL), TS-RERA Portal.</a:t>
+            </a:r>
+          </a:p>
+        </p:txBody>
+      </p:sp>
+      <p:sp>
+        <p:nvSpPr>
+          <p:cNvPr id="17411" name="Rounded Rectangle 17410"/>
           <p:cNvSpPr/>
           <p:nvPr/>
         </p:nvSpPr>
         <p:spPr>
           <a:xfrm>
             <a:off x="6949440" y="1188720"/>
-            <a:ext cx="4709160" cy="1005840"/>
+            <a:ext cx="4709160" cy="960120"/>
           </a:xfrm>
           <a:prstGeom prst="roundRect">
             <a:avLst/>
@@ -11657,7 +10934,7 @@
           <a:p>
             <a:pPr algn="ctr">
               <a:spcAft>
-                <a:spcPts val="200"/>
+                <a:spcPts val="300"/>
               </a:spcAft>
             </a:pPr>
             <a:r>
@@ -11667,7 +10944,7 @@
                 </a:solidFill>
                 <a:latin typeface="Arial"/>
               </a:rPr>
-              <a:t>🚀 Working Prototype &amp; Open Source Repository</a:t>
+              <a:t>Working Prototype &amp; Repository</a:t>
             </a:r>
           </a:p>
           <a:p>
@@ -11678,7 +10955,7 @@
                 </a:solidFill>
                 <a:latin typeface="Arial"/>
               </a:rPr>
-              <a:t>• GitHub: </a:t>
+              <a:t>GitHub: </a:t>
             </a:r>
             <a:r>
               <a:rPr sz="850" b="0" i="0">
@@ -11698,7 +10975,7 @@
                 </a:solidFill>
                 <a:latin typeface="Arial"/>
               </a:rPr>
-              <a:t>• 3D Viewer: </a:t>
+              <a:t>3D Viewer: </a:t>
             </a:r>
             <a:r>
               <a:rPr sz="850" b="0" i="0">
@@ -11707,7 +10984,7 @@
                 </a:solidFill>
                 <a:latin typeface="Arial"/>
               </a:rPr>
-              <a:t>localhost:3000 (Next.js 16 + Three.js r185)</a:t>
+              <a:t>localhost:3000 (Next.js 16 + Three.js)</a:t>
             </a:r>
           </a:p>
           <a:p>
@@ -11718,7 +10995,7 @@
                 </a:solidFill>
                 <a:latin typeface="Arial"/>
               </a:rPr>
-              <a:t>• Pipeline: </a:t>
+              <a:t>Pipeline: </a:t>
             </a:r>
             <a:r>
               <a:rPr sz="850" b="0" i="0">
@@ -11729,55 +11006,12 @@
               </a:rPr>
               <a:t>python scripts/pipeline.py --city hyderabad</a:t>
             </a:r>
-          </a:p>
-        </p:txBody>
-      </p:sp>
-      <p:sp>
-        <p:nvSpPr>
-          <p:cNvPr id="17413" name="Rectangle 17412"/>
-          <p:cNvSpPr/>
-          <p:nvPr/>
-        </p:nvSpPr>
-        <p:spPr>
-          <a:xfrm>
-            <a:off x="7040880" y="1234440"/>
-            <a:ext cx="4526280" cy="36576"/>
-          </a:xfrm>
-          <a:prstGeom prst="rect">
-            <a:avLst/>
-          </a:prstGeom>
-          <a:solidFill>
-            <a:srgbClr val="34D399"/>
-          </a:solidFill>
-          <a:ln>
-            <a:noFill/>
-          </a:ln>
-        </p:spPr>
-        <p:style>
-          <a:lnRef idx="1">
-            <a:schemeClr val="accent1"/>
-          </a:lnRef>
-          <a:fillRef idx="3">
-            <a:schemeClr val="accent1"/>
-          </a:fillRef>
-          <a:effectRef idx="2">
-            <a:schemeClr val="accent1"/>
-          </a:effectRef>
-          <a:fontRef idx="minor">
-            <a:schemeClr val="lt1"/>
-          </a:fontRef>
-        </p:style>
-        <p:txBody>
-          <a:bodyPr rtlCol="0" anchor="ctr"/>
-          <a:lstStyle/>
-          <a:p>
-            <a:pPr algn="ctr"/>
           </a:p>
         </p:txBody>
       </p:sp>
       <p:pic>
         <p:nvPicPr>
-          <p:cNvPr id="17414" name="Picture 17413" descr="prototype_cropped.png"/>
+          <p:cNvPr id="17412" name="Picture 17411" descr="prototype_cropped.png"/>
           <p:cNvPicPr>
             <a:picLocks noChangeAspect="1"/>
           </p:cNvPicPr>
@@ -11791,8 +11025,8 @@
         </p:blipFill>
         <p:spPr>
           <a:xfrm>
-            <a:off x="6949440" y="2286000"/>
-            <a:ext cx="4709160" cy="3657600"/>
+            <a:off x="6949440" y="2240280"/>
+            <a:ext cx="4709160" cy="3703320"/>
           </a:xfrm>
           <a:prstGeom prst="rect">
             <a:avLst/>
